--- a/docs/pptx/carbo/ritu-carbo-scatter-epi.pptx
+++ b/docs/pptx/carbo/ritu-carbo-scatter-epi.pptx
@@ -3360,7 +3360,7 @@
           </p:nvSpPr>
           <p:spPr>
             <a:xfrm>
-              <a:off x="4247179" y="4491920"/>
+              <a:off x="4247181" y="4491921"/>
               <a:ext cx="49651" cy="49651"/>
             </a:xfrm>
             <a:prstGeom prst="ellipse">
@@ -4445,7 +4445,7 @@
           </p:nvSpPr>
           <p:spPr>
             <a:xfrm>
-              <a:off x="3141695" y="3951060"/>
+              <a:off x="4555280" y="4388761"/>
               <a:ext cx="49651" cy="49651"/>
             </a:xfrm>
             <a:prstGeom prst="ellipse">
@@ -4480,7 +4480,7 @@
           </p:nvSpPr>
           <p:spPr>
             <a:xfrm>
-              <a:off x="4555280" y="4388761"/>
+              <a:off x="5552867" y="4573368"/>
               <a:ext cx="49651" cy="49651"/>
             </a:xfrm>
             <a:prstGeom prst="ellipse">
@@ -4515,7 +4515,7 @@
           </p:nvSpPr>
           <p:spPr>
             <a:xfrm>
-              <a:off x="5552867" y="4573368"/>
+              <a:off x="4209054" y="4840137"/>
               <a:ext cx="49651" cy="49651"/>
             </a:xfrm>
             <a:prstGeom prst="ellipse">
@@ -4550,7 +4550,7 @@
           </p:nvSpPr>
           <p:spPr>
             <a:xfrm>
-              <a:off x="4209054" y="4840137"/>
+              <a:off x="3705003" y="3989203"/>
               <a:ext cx="49651" cy="49651"/>
             </a:xfrm>
             <a:prstGeom prst="ellipse">
@@ -4585,7 +4585,7 @@
           </p:nvSpPr>
           <p:spPr>
             <a:xfrm>
-              <a:off x="3705003" y="3989203"/>
+              <a:off x="5129376" y="4708005"/>
               <a:ext cx="49651" cy="49651"/>
             </a:xfrm>
             <a:prstGeom prst="ellipse">
@@ -4620,7 +4620,7 @@
           </p:nvSpPr>
           <p:spPr>
             <a:xfrm>
-              <a:off x="5129376" y="4708005"/>
+              <a:off x="6280256" y="4834462"/>
               <a:ext cx="49651" cy="49651"/>
             </a:xfrm>
             <a:prstGeom prst="ellipse">
@@ -4655,7 +4655,7 @@
           </p:nvSpPr>
           <p:spPr>
             <a:xfrm>
-              <a:off x="6280256" y="4834462"/>
+              <a:off x="5367865" y="4261499"/>
               <a:ext cx="49651" cy="49651"/>
             </a:xfrm>
             <a:prstGeom prst="ellipse">
@@ -4690,7 +4690,7 @@
           </p:nvSpPr>
           <p:spPr>
             <a:xfrm>
-              <a:off x="5367865" y="4261499"/>
+              <a:off x="3177140" y="5082764"/>
               <a:ext cx="49651" cy="49651"/>
             </a:xfrm>
             <a:prstGeom prst="ellipse">
@@ -4725,7 +4725,7 @@
           </p:nvSpPr>
           <p:spPr>
             <a:xfrm>
-              <a:off x="3177140" y="5082764"/>
+              <a:off x="3848236" y="4523497"/>
               <a:ext cx="49651" cy="49651"/>
             </a:xfrm>
             <a:prstGeom prst="ellipse">
@@ -4760,7 +4760,7 @@
           </p:nvSpPr>
           <p:spPr>
             <a:xfrm>
-              <a:off x="3848236" y="4523497"/>
+              <a:off x="4508625" y="4661579"/>
               <a:ext cx="49651" cy="49651"/>
             </a:xfrm>
             <a:prstGeom prst="ellipse">
@@ -4795,7 +4795,7 @@
           </p:nvSpPr>
           <p:spPr>
             <a:xfrm>
-              <a:off x="4508625" y="4661579"/>
+              <a:off x="5887995" y="4371236"/>
               <a:ext cx="49651" cy="49651"/>
             </a:xfrm>
             <a:prstGeom prst="ellipse">
@@ -4830,7 +4830,7 @@
           </p:nvSpPr>
           <p:spPr>
             <a:xfrm>
-              <a:off x="5887995" y="4371236"/>
+              <a:off x="5549628" y="4491299"/>
               <a:ext cx="49651" cy="49651"/>
             </a:xfrm>
             <a:prstGeom prst="ellipse">
@@ -4865,7 +4865,7 @@
           </p:nvSpPr>
           <p:spPr>
             <a:xfrm>
-              <a:off x="5549628" y="4491299"/>
+              <a:off x="4574618" y="4862931"/>
               <a:ext cx="49651" cy="49651"/>
             </a:xfrm>
             <a:prstGeom prst="ellipse">
@@ -4900,7 +4900,7 @@
           </p:nvSpPr>
           <p:spPr>
             <a:xfrm>
-              <a:off x="4574618" y="4862931"/>
+              <a:off x="4319445" y="3456872"/>
               <a:ext cx="49651" cy="49651"/>
             </a:xfrm>
             <a:prstGeom prst="ellipse">
@@ -4935,7 +4935,7 @@
           </p:nvSpPr>
           <p:spPr>
             <a:xfrm>
-              <a:off x="4319445" y="3456872"/>
+              <a:off x="4641374" y="4775923"/>
               <a:ext cx="49651" cy="49651"/>
             </a:xfrm>
             <a:prstGeom prst="ellipse">
@@ -4970,7 +4970,7 @@
           </p:nvSpPr>
           <p:spPr>
             <a:xfrm>
-              <a:off x="4641374" y="4775923"/>
+              <a:off x="5315914" y="4932441"/>
               <a:ext cx="49651" cy="49651"/>
             </a:xfrm>
             <a:prstGeom prst="ellipse">
@@ -5005,7 +5005,7 @@
           </p:nvSpPr>
           <p:spPr>
             <a:xfrm>
-              <a:off x="5315914" y="4932441"/>
+              <a:off x="2682352" y="4464996"/>
               <a:ext cx="49651" cy="49651"/>
             </a:xfrm>
             <a:prstGeom prst="ellipse">
@@ -5040,7 +5040,7 @@
           </p:nvSpPr>
           <p:spPr>
             <a:xfrm>
-              <a:off x="2682352" y="4464996"/>
+              <a:off x="6011061" y="4149900"/>
               <a:ext cx="49651" cy="49651"/>
             </a:xfrm>
             <a:prstGeom prst="ellipse">
@@ -5075,7 +5075,7 @@
           </p:nvSpPr>
           <p:spPr>
             <a:xfrm>
-              <a:off x="6011061" y="4149900"/>
+              <a:off x="7463309" y="4445833"/>
               <a:ext cx="49651" cy="49651"/>
             </a:xfrm>
             <a:prstGeom prst="ellipse">
@@ -5110,7 +5110,7 @@
           </p:nvSpPr>
           <p:spPr>
             <a:xfrm>
-              <a:off x="7463309" y="4445833"/>
+              <a:off x="4209702" y="4931623"/>
               <a:ext cx="49651" cy="49651"/>
             </a:xfrm>
             <a:prstGeom prst="ellipse">
@@ -5145,7 +5145,7 @@
           </p:nvSpPr>
           <p:spPr>
             <a:xfrm>
-              <a:off x="4209702" y="4931623"/>
+              <a:off x="5124549" y="4832592"/>
               <a:ext cx="49651" cy="49651"/>
             </a:xfrm>
             <a:prstGeom prst="ellipse">
@@ -5180,7 +5180,7 @@
           </p:nvSpPr>
           <p:spPr>
             <a:xfrm>
-              <a:off x="5124549" y="4832592"/>
+              <a:off x="4288577" y="4484041"/>
               <a:ext cx="49651" cy="49651"/>
             </a:xfrm>
             <a:prstGeom prst="ellipse">
@@ -5215,7 +5215,7 @@
           </p:nvSpPr>
           <p:spPr>
             <a:xfrm>
-              <a:off x="4288577" y="4484041"/>
+              <a:off x="4841694" y="5251806"/>
               <a:ext cx="49651" cy="49651"/>
             </a:xfrm>
             <a:prstGeom prst="ellipse">
@@ -5250,7 +5250,7 @@
           </p:nvSpPr>
           <p:spPr>
             <a:xfrm>
-              <a:off x="4841694" y="5251806"/>
+              <a:off x="6034348" y="4349796"/>
               <a:ext cx="49651" cy="49651"/>
             </a:xfrm>
             <a:prstGeom prst="ellipse">
@@ -5285,7 +5285,7 @@
           </p:nvSpPr>
           <p:spPr>
             <a:xfrm>
-              <a:off x="6034348" y="4349796"/>
+              <a:off x="4992001" y="5524381"/>
               <a:ext cx="49651" cy="49651"/>
             </a:xfrm>
             <a:prstGeom prst="ellipse">
@@ -5320,7 +5320,7 @@
           </p:nvSpPr>
           <p:spPr>
             <a:xfrm>
-              <a:off x="4992001" y="5524381"/>
+              <a:off x="4333640" y="4058540"/>
               <a:ext cx="49651" cy="49651"/>
             </a:xfrm>
             <a:prstGeom prst="ellipse">
@@ -5355,7 +5355,7 @@
           </p:nvSpPr>
           <p:spPr>
             <a:xfrm>
-              <a:off x="4333640" y="4058540"/>
+              <a:off x="3974323" y="3981333"/>
               <a:ext cx="49651" cy="49651"/>
             </a:xfrm>
             <a:prstGeom prst="ellipse">
@@ -5390,7 +5390,7 @@
           </p:nvSpPr>
           <p:spPr>
             <a:xfrm>
-              <a:off x="3974323" y="3981333"/>
+              <a:off x="6119307" y="4700185"/>
               <a:ext cx="49651" cy="49651"/>
             </a:xfrm>
             <a:prstGeom prst="ellipse">
@@ -5425,7 +5425,7 @@
           </p:nvSpPr>
           <p:spPr>
             <a:xfrm>
-              <a:off x="6119307" y="4700185"/>
+              <a:off x="6074968" y="4872866"/>
               <a:ext cx="49651" cy="49651"/>
             </a:xfrm>
             <a:prstGeom prst="ellipse">
@@ -5460,7 +5460,7 @@
           </p:nvSpPr>
           <p:spPr>
             <a:xfrm>
-              <a:off x="6074968" y="4872866"/>
+              <a:off x="5432404" y="5216709"/>
               <a:ext cx="49651" cy="49651"/>
             </a:xfrm>
             <a:prstGeom prst="ellipse">
@@ -5495,7 +5495,7 @@
           </p:nvSpPr>
           <p:spPr>
             <a:xfrm>
-              <a:off x="5432404" y="5216709"/>
+              <a:off x="2585964" y="4299826"/>
               <a:ext cx="49651" cy="49651"/>
             </a:xfrm>
             <a:prstGeom prst="ellipse">
@@ -5530,7 +5530,7 @@
           </p:nvSpPr>
           <p:spPr>
             <a:xfrm>
-              <a:off x="2585964" y="4299826"/>
+              <a:off x="2259866" y="4412403"/>
               <a:ext cx="49651" cy="49651"/>
             </a:xfrm>
             <a:prstGeom prst="ellipse">
@@ -5565,7 +5565,7 @@
           </p:nvSpPr>
           <p:spPr>
             <a:xfrm>
-              <a:off x="2259866" y="4412403"/>
+              <a:off x="4359037" y="4494186"/>
               <a:ext cx="49651" cy="49651"/>
             </a:xfrm>
             <a:prstGeom prst="ellipse">
@@ -5600,7 +5600,7 @@
           </p:nvSpPr>
           <p:spPr>
             <a:xfrm>
-              <a:off x="4359037" y="4494186"/>
+              <a:off x="4981439" y="5186370"/>
               <a:ext cx="49651" cy="49651"/>
             </a:xfrm>
             <a:prstGeom prst="ellipse">
@@ -5635,7 +5635,7 @@
           </p:nvSpPr>
           <p:spPr>
             <a:xfrm>
-              <a:off x="4981439" y="5186370"/>
+              <a:off x="6585651" y="4369012"/>
               <a:ext cx="49651" cy="49651"/>
             </a:xfrm>
             <a:prstGeom prst="ellipse">
@@ -5670,7 +5670,7 @@
           </p:nvSpPr>
           <p:spPr>
             <a:xfrm>
-              <a:off x="6585651" y="4369012"/>
+              <a:off x="5466642" y="3950134"/>
               <a:ext cx="49651" cy="49651"/>
             </a:xfrm>
             <a:prstGeom prst="ellipse">
@@ -5705,7 +5705,7 @@
           </p:nvSpPr>
           <p:spPr>
             <a:xfrm>
-              <a:off x="5466642" y="3950134"/>
+              <a:off x="2343487" y="4414740"/>
               <a:ext cx="49651" cy="49651"/>
             </a:xfrm>
             <a:prstGeom prst="ellipse">
@@ -5740,7 +5740,7 @@
           </p:nvSpPr>
           <p:spPr>
             <a:xfrm>
-              <a:off x="2343487" y="4414740"/>
+              <a:off x="5451686" y="4171259"/>
               <a:ext cx="49651" cy="49651"/>
             </a:xfrm>
             <a:prstGeom prst="ellipse">
@@ -5775,7 +5775,7 @@
           </p:nvSpPr>
           <p:spPr>
             <a:xfrm>
-              <a:off x="5451686" y="4171259"/>
+              <a:off x="4992443" y="4495810"/>
               <a:ext cx="49651" cy="49651"/>
             </a:xfrm>
             <a:prstGeom prst="ellipse">
@@ -5810,7 +5810,7 @@
           </p:nvSpPr>
           <p:spPr>
             <a:xfrm>
-              <a:off x="4992443" y="4495810"/>
+              <a:off x="4045776" y="4642912"/>
               <a:ext cx="49651" cy="49651"/>
             </a:xfrm>
             <a:prstGeom prst="ellipse">
@@ -5845,7 +5845,7 @@
           </p:nvSpPr>
           <p:spPr>
             <a:xfrm>
-              <a:off x="4045776" y="4642912"/>
+              <a:off x="5101138" y="3687010"/>
               <a:ext cx="49651" cy="49651"/>
             </a:xfrm>
             <a:prstGeom prst="ellipse">
@@ -5880,7 +5880,7 @@
           </p:nvSpPr>
           <p:spPr>
             <a:xfrm>
-              <a:off x="5101138" y="3687010"/>
+              <a:off x="4241651" y="4403215"/>
               <a:ext cx="49651" cy="49651"/>
             </a:xfrm>
             <a:prstGeom prst="ellipse">
@@ -5915,7 +5915,7 @@
           </p:nvSpPr>
           <p:spPr>
             <a:xfrm>
-              <a:off x="4241651" y="4403215"/>
+              <a:off x="4629888" y="5246686"/>
               <a:ext cx="49651" cy="49651"/>
             </a:xfrm>
             <a:prstGeom prst="ellipse">
@@ -5950,7 +5950,7 @@
           </p:nvSpPr>
           <p:spPr>
             <a:xfrm>
-              <a:off x="4629888" y="5246686"/>
+              <a:off x="4244861" y="4072001"/>
               <a:ext cx="49651" cy="49651"/>
             </a:xfrm>
             <a:prstGeom prst="ellipse">
@@ -5985,7 +5985,7 @@
           </p:nvSpPr>
           <p:spPr>
             <a:xfrm>
-              <a:off x="4244861" y="4072001"/>
+              <a:off x="5671708" y="4454483"/>
               <a:ext cx="49651" cy="49651"/>
             </a:xfrm>
             <a:prstGeom prst="ellipse">
@@ -6020,7 +6020,7 @@
           </p:nvSpPr>
           <p:spPr>
             <a:xfrm>
-              <a:off x="5671708" y="4454483"/>
+              <a:off x="7584230" y="4445833"/>
               <a:ext cx="49651" cy="49651"/>
             </a:xfrm>
             <a:prstGeom prst="ellipse">
@@ -6055,7 +6055,7 @@
           </p:nvSpPr>
           <p:spPr>
             <a:xfrm>
-              <a:off x="7584230" y="4445833"/>
+              <a:off x="5684675" y="5352216"/>
               <a:ext cx="49651" cy="49651"/>
             </a:xfrm>
             <a:prstGeom prst="ellipse">
@@ -6090,7 +6090,7 @@
           </p:nvSpPr>
           <p:spPr>
             <a:xfrm>
-              <a:off x="5684675" y="5352216"/>
+              <a:off x="5084554" y="4947064"/>
               <a:ext cx="49651" cy="49651"/>
             </a:xfrm>
             <a:prstGeom prst="ellipse">
@@ -6125,7 +6125,7 @@
           </p:nvSpPr>
           <p:spPr>
             <a:xfrm>
-              <a:off x="5084554" y="4947064"/>
+              <a:off x="3996361" y="4537735"/>
               <a:ext cx="49651" cy="49651"/>
             </a:xfrm>
             <a:prstGeom prst="ellipse">
@@ -6160,7 +6160,7 @@
           </p:nvSpPr>
           <p:spPr>
             <a:xfrm>
-              <a:off x="3996361" y="4537735"/>
+              <a:off x="5833967" y="5144097"/>
               <a:ext cx="49651" cy="49651"/>
             </a:xfrm>
             <a:prstGeom prst="ellipse">
@@ -6195,7 +6195,7 @@
           </p:nvSpPr>
           <p:spPr>
             <a:xfrm>
-              <a:off x="5833967" y="5144097"/>
+              <a:off x="2010741" y="4417943"/>
               <a:ext cx="49651" cy="49651"/>
             </a:xfrm>
             <a:prstGeom prst="ellipse">
@@ -6230,7 +6230,7 @@
           </p:nvSpPr>
           <p:spPr>
             <a:xfrm>
-              <a:off x="2010741" y="4417943"/>
+              <a:off x="4475500" y="4534072"/>
               <a:ext cx="49651" cy="49651"/>
             </a:xfrm>
             <a:prstGeom prst="ellipse">
@@ -6265,7 +6265,7 @@
           </p:nvSpPr>
           <p:spPr>
             <a:xfrm>
-              <a:off x="4475500" y="4534072"/>
+              <a:off x="5289603" y="4463844"/>
               <a:ext cx="49651" cy="49651"/>
             </a:xfrm>
             <a:prstGeom prst="ellipse">
@@ -6300,7 +6300,7 @@
           </p:nvSpPr>
           <p:spPr>
             <a:xfrm>
-              <a:off x="5289603" y="4463844"/>
+              <a:off x="4819304" y="3884761"/>
               <a:ext cx="49651" cy="49651"/>
             </a:xfrm>
             <a:prstGeom prst="ellipse">
@@ -6335,7 +6335,7 @@
           </p:nvSpPr>
           <p:spPr>
             <a:xfrm>
-              <a:off x="4819304" y="3884761"/>
+              <a:off x="2292467" y="3857991"/>
               <a:ext cx="49651" cy="49651"/>
             </a:xfrm>
             <a:prstGeom prst="ellipse">
@@ -6370,7 +6370,7 @@
           </p:nvSpPr>
           <p:spPr>
             <a:xfrm>
-              <a:off x="2292467" y="3857991"/>
+              <a:off x="5313039" y="5401751"/>
               <a:ext cx="49651" cy="49651"/>
             </a:xfrm>
             <a:prstGeom prst="ellipse">
@@ -6405,7 +6405,7 @@
           </p:nvSpPr>
           <p:spPr>
             <a:xfrm>
-              <a:off x="5313039" y="5401751"/>
+              <a:off x="4911238" y="5002640"/>
               <a:ext cx="49651" cy="49651"/>
             </a:xfrm>
             <a:prstGeom prst="ellipse">
@@ -6440,7 +6440,7 @@
           </p:nvSpPr>
           <p:spPr>
             <a:xfrm>
-              <a:off x="4911238" y="5002640"/>
+              <a:off x="4730755" y="5123265"/>
               <a:ext cx="49651" cy="49651"/>
             </a:xfrm>
             <a:prstGeom prst="ellipse">
@@ -6475,7 +6475,7 @@
           </p:nvSpPr>
           <p:spPr>
             <a:xfrm>
-              <a:off x="4730755" y="5123265"/>
+              <a:off x="5517749" y="4187576"/>
               <a:ext cx="49651" cy="49651"/>
             </a:xfrm>
             <a:prstGeom prst="ellipse">
@@ -6510,7 +6510,7 @@
           </p:nvSpPr>
           <p:spPr>
             <a:xfrm>
-              <a:off x="5517749" y="4187576"/>
+              <a:off x="3878115" y="4693152"/>
               <a:ext cx="49651" cy="49651"/>
             </a:xfrm>
             <a:prstGeom prst="ellipse">
@@ -6545,7 +6545,7 @@
           </p:nvSpPr>
           <p:spPr>
             <a:xfrm>
-              <a:off x="3878115" y="4693152"/>
+              <a:off x="4464516" y="4166656"/>
               <a:ext cx="49651" cy="49651"/>
             </a:xfrm>
             <a:prstGeom prst="ellipse">
@@ -6580,7 +6580,7 @@
           </p:nvSpPr>
           <p:spPr>
             <a:xfrm>
-              <a:off x="4464516" y="4166656"/>
+              <a:off x="4707286" y="5107206"/>
               <a:ext cx="49651" cy="49651"/>
             </a:xfrm>
             <a:prstGeom prst="ellipse">
@@ -6615,7 +6615,7 @@
           </p:nvSpPr>
           <p:spPr>
             <a:xfrm>
-              <a:off x="4707286" y="5107206"/>
+              <a:off x="5525391" y="4218465"/>
               <a:ext cx="49651" cy="49651"/>
             </a:xfrm>
             <a:prstGeom prst="ellipse">
@@ -6650,7 +6650,7 @@
           </p:nvSpPr>
           <p:spPr>
             <a:xfrm>
-              <a:off x="5525391" y="4218465"/>
+              <a:off x="5115639" y="4303724"/>
               <a:ext cx="49651" cy="49651"/>
             </a:xfrm>
             <a:prstGeom prst="ellipse">
@@ -6685,7 +6685,7 @@
           </p:nvSpPr>
           <p:spPr>
             <a:xfrm>
-              <a:off x="5115639" y="4303724"/>
+              <a:off x="7524374" y="4445833"/>
               <a:ext cx="49651" cy="49651"/>
             </a:xfrm>
             <a:prstGeom prst="ellipse">
@@ -6720,7 +6720,7 @@
           </p:nvSpPr>
           <p:spPr>
             <a:xfrm>
-              <a:off x="7524374" y="4445833"/>
+              <a:off x="3737334" y="5355399"/>
               <a:ext cx="49651" cy="49651"/>
             </a:xfrm>
             <a:prstGeom prst="ellipse">
@@ -6755,7 +6755,7 @@
           </p:nvSpPr>
           <p:spPr>
             <a:xfrm>
-              <a:off x="3737334" y="5355399"/>
+              <a:off x="5262586" y="5409570"/>
               <a:ext cx="49651" cy="49651"/>
             </a:xfrm>
             <a:prstGeom prst="ellipse">
@@ -6790,7 +6790,7 @@
           </p:nvSpPr>
           <p:spPr>
             <a:xfrm>
-              <a:off x="5262586" y="5409570"/>
+              <a:off x="6528929" y="5288071"/>
               <a:ext cx="49651" cy="49651"/>
             </a:xfrm>
             <a:prstGeom prst="ellipse">
@@ -6825,7 +6825,7 @@
           </p:nvSpPr>
           <p:spPr>
             <a:xfrm>
-              <a:off x="6528929" y="5288071"/>
+              <a:off x="6913606" y="4780833"/>
               <a:ext cx="49651" cy="49651"/>
             </a:xfrm>
             <a:prstGeom prst="ellipse">
@@ -6860,7 +6860,7 @@
           </p:nvSpPr>
           <p:spPr>
             <a:xfrm>
-              <a:off x="6913606" y="4780833"/>
+              <a:off x="7486267" y="4445833"/>
               <a:ext cx="49651" cy="49651"/>
             </a:xfrm>
             <a:prstGeom prst="ellipse">
@@ -6895,7 +6895,7 @@
           </p:nvSpPr>
           <p:spPr>
             <a:xfrm>
-              <a:off x="7486267" y="4445833"/>
+              <a:off x="6095384" y="4890110"/>
               <a:ext cx="49651" cy="49651"/>
             </a:xfrm>
             <a:prstGeom prst="ellipse">
@@ -6930,7 +6930,7 @@
           </p:nvSpPr>
           <p:spPr>
             <a:xfrm>
-              <a:off x="6095384" y="4890110"/>
+              <a:off x="3776137" y="2045672"/>
               <a:ext cx="49651" cy="49651"/>
             </a:xfrm>
             <a:prstGeom prst="ellipse">
@@ -6965,7 +6965,7 @@
           </p:nvSpPr>
           <p:spPr>
             <a:xfrm>
-              <a:off x="3776137" y="2045672"/>
+              <a:off x="5124037" y="4881211"/>
               <a:ext cx="49651" cy="49651"/>
             </a:xfrm>
             <a:prstGeom prst="ellipse">
@@ -7000,7 +7000,7 @@
           </p:nvSpPr>
           <p:spPr>
             <a:xfrm>
-              <a:off x="5124037" y="4881211"/>
+              <a:off x="5941427" y="4192905"/>
               <a:ext cx="49651" cy="49651"/>
             </a:xfrm>
             <a:prstGeom prst="ellipse">
@@ -7035,7 +7035,7 @@
           </p:nvSpPr>
           <p:spPr>
             <a:xfrm>
-              <a:off x="5941427" y="4192905"/>
+              <a:off x="2374745" y="4316817"/>
               <a:ext cx="49651" cy="49651"/>
             </a:xfrm>
             <a:prstGeom prst="ellipse">
@@ -7070,7 +7070,7 @@
           </p:nvSpPr>
           <p:spPr>
             <a:xfrm>
-              <a:off x="2374745" y="4316817"/>
+              <a:off x="3989760" y="4499796"/>
               <a:ext cx="49651" cy="49651"/>
             </a:xfrm>
             <a:prstGeom prst="ellipse">
@@ -7105,7 +7105,7 @@
           </p:nvSpPr>
           <p:spPr>
             <a:xfrm>
-              <a:off x="3989760" y="4499796"/>
+              <a:off x="6163064" y="3855548"/>
               <a:ext cx="49651" cy="49651"/>
             </a:xfrm>
             <a:prstGeom prst="ellipse">
@@ -7140,7 +7140,7 @@
           </p:nvSpPr>
           <p:spPr>
             <a:xfrm>
-              <a:off x="6163064" y="3855548"/>
+              <a:off x="4900003" y="4410928"/>
               <a:ext cx="49651" cy="49651"/>
             </a:xfrm>
             <a:prstGeom prst="ellipse">
@@ -7175,7 +7175,7 @@
           </p:nvSpPr>
           <p:spPr>
             <a:xfrm>
-              <a:off x="4900003" y="4410928"/>
+              <a:off x="4959764" y="4264387"/>
               <a:ext cx="49651" cy="49651"/>
             </a:xfrm>
             <a:prstGeom prst="ellipse">
@@ -7210,7 +7210,7 @@
           </p:nvSpPr>
           <p:spPr>
             <a:xfrm>
-              <a:off x="4959764" y="4264387"/>
+              <a:off x="5342426" y="3344681"/>
               <a:ext cx="49651" cy="49651"/>
             </a:xfrm>
             <a:prstGeom prst="ellipse">
@@ -7245,7 +7245,7 @@
           </p:nvSpPr>
           <p:spPr>
             <a:xfrm>
-              <a:off x="5342426" y="3344681"/>
+              <a:off x="7080761" y="4445833"/>
               <a:ext cx="49651" cy="49651"/>
             </a:xfrm>
             <a:prstGeom prst="ellipse">
@@ -7280,7 +7280,7 @@
           </p:nvSpPr>
           <p:spPr>
             <a:xfrm>
-              <a:off x="7080761" y="4445833"/>
+              <a:off x="4284941" y="3646555"/>
               <a:ext cx="49651" cy="49651"/>
             </a:xfrm>
             <a:prstGeom prst="ellipse">
@@ -7315,7 +7315,7 @@
           </p:nvSpPr>
           <p:spPr>
             <a:xfrm>
-              <a:off x="4284941" y="3646555"/>
+              <a:off x="6090826" y="4433986"/>
               <a:ext cx="49651" cy="49651"/>
             </a:xfrm>
             <a:prstGeom prst="ellipse">
@@ -7350,7 +7350,7 @@
           </p:nvSpPr>
           <p:spPr>
             <a:xfrm>
-              <a:off x="6090826" y="4433986"/>
+              <a:off x="4517067" y="4683142"/>
               <a:ext cx="49651" cy="49651"/>
             </a:xfrm>
             <a:prstGeom prst="ellipse">
@@ -7385,7 +7385,7 @@
           </p:nvSpPr>
           <p:spPr>
             <a:xfrm>
-              <a:off x="4517067" y="4683142"/>
+              <a:off x="5648606" y="4676490"/>
               <a:ext cx="49651" cy="49651"/>
             </a:xfrm>
             <a:prstGeom prst="ellipse">
@@ -7420,7 +7420,7 @@
           </p:nvSpPr>
           <p:spPr>
             <a:xfrm>
-              <a:off x="5648606" y="4676490"/>
+              <a:off x="2968151" y="4425680"/>
               <a:ext cx="49651" cy="49651"/>
             </a:xfrm>
             <a:prstGeom prst="ellipse">
@@ -7455,7 +7455,7 @@
           </p:nvSpPr>
           <p:spPr>
             <a:xfrm>
-              <a:off x="2968151" y="4425680"/>
+              <a:off x="5710314" y="4353195"/>
               <a:ext cx="49651" cy="49651"/>
             </a:xfrm>
             <a:prstGeom prst="ellipse">
@@ -7490,7 +7490,7 @@
           </p:nvSpPr>
           <p:spPr>
             <a:xfrm>
-              <a:off x="5710314" y="4353195"/>
+              <a:off x="5740438" y="4501817"/>
               <a:ext cx="49651" cy="49651"/>
             </a:xfrm>
             <a:prstGeom prst="ellipse">
@@ -7525,7 +7525,7 @@
           </p:nvSpPr>
           <p:spPr>
             <a:xfrm>
-              <a:off x="5740438" y="4501817"/>
+              <a:off x="4034946" y="4926349"/>
               <a:ext cx="49651" cy="49651"/>
             </a:xfrm>
             <a:prstGeom prst="ellipse">
@@ -7560,7 +7560,7 @@
           </p:nvSpPr>
           <p:spPr>
             <a:xfrm>
-              <a:off x="4034946" y="4926349"/>
+              <a:off x="6627535" y="4519950"/>
               <a:ext cx="49651" cy="49651"/>
             </a:xfrm>
             <a:prstGeom prst="ellipse">
@@ -7595,7 +7595,7 @@
           </p:nvSpPr>
           <p:spPr>
             <a:xfrm>
-              <a:off x="6627535" y="4519950"/>
+              <a:off x="6370715" y="4472448"/>
               <a:ext cx="49651" cy="49651"/>
             </a:xfrm>
             <a:prstGeom prst="ellipse">
@@ -7630,7 +7630,7 @@
           </p:nvSpPr>
           <p:spPr>
             <a:xfrm>
-              <a:off x="6370715" y="4472448"/>
+              <a:off x="4284592" y="4121146"/>
               <a:ext cx="49651" cy="49651"/>
             </a:xfrm>
             <a:prstGeom prst="ellipse">
@@ -7665,7 +7665,7 @@
           </p:nvSpPr>
           <p:spPr>
             <a:xfrm>
-              <a:off x="4284592" y="4121146"/>
+              <a:off x="5480828" y="4959254"/>
               <a:ext cx="49651" cy="49651"/>
             </a:xfrm>
             <a:prstGeom prst="ellipse">
@@ -7700,7 +7700,7 @@
           </p:nvSpPr>
           <p:spPr>
             <a:xfrm>
-              <a:off x="5480828" y="4959254"/>
+              <a:off x="7543304" y="4445833"/>
               <a:ext cx="49651" cy="49651"/>
             </a:xfrm>
             <a:prstGeom prst="ellipse">
@@ -7735,7 +7735,7 @@
           </p:nvSpPr>
           <p:spPr>
             <a:xfrm>
-              <a:off x="7543304" y="4445833"/>
+              <a:off x="7553526" y="4445833"/>
               <a:ext cx="49651" cy="49651"/>
             </a:xfrm>
             <a:prstGeom prst="ellipse">
@@ -7770,7 +7770,7 @@
           </p:nvSpPr>
           <p:spPr>
             <a:xfrm>
-              <a:off x="7553526" y="4445833"/>
+              <a:off x="6024783" y="3748356"/>
               <a:ext cx="49651" cy="49651"/>
             </a:xfrm>
             <a:prstGeom prst="ellipse">
@@ -7805,7 +7805,7 @@
           </p:nvSpPr>
           <p:spPr>
             <a:xfrm>
-              <a:off x="6024783" y="3748356"/>
+              <a:off x="6451305" y="4217579"/>
               <a:ext cx="49651" cy="49651"/>
             </a:xfrm>
             <a:prstGeom prst="ellipse">
@@ -7840,7 +7840,7 @@
           </p:nvSpPr>
           <p:spPr>
             <a:xfrm>
-              <a:off x="6451305" y="4217579"/>
+              <a:off x="5535668" y="4335002"/>
               <a:ext cx="49651" cy="49651"/>
             </a:xfrm>
             <a:prstGeom prst="ellipse">
@@ -7875,7 +7875,7 @@
           </p:nvSpPr>
           <p:spPr>
             <a:xfrm>
-              <a:off x="5535668" y="4335002"/>
+              <a:off x="5610856" y="3427490"/>
               <a:ext cx="49651" cy="49651"/>
             </a:xfrm>
             <a:prstGeom prst="ellipse">
@@ -7910,7 +7910,7 @@
           </p:nvSpPr>
           <p:spPr>
             <a:xfrm>
-              <a:off x="5610856" y="3427490"/>
+              <a:off x="5273356" y="4745209"/>
               <a:ext cx="49651" cy="49651"/>
             </a:xfrm>
             <a:prstGeom prst="ellipse">
@@ -7945,7 +7945,7 @@
           </p:nvSpPr>
           <p:spPr>
             <a:xfrm>
-              <a:off x="5273356" y="4745209"/>
+              <a:off x="5163948" y="4624715"/>
               <a:ext cx="49651" cy="49651"/>
             </a:xfrm>
             <a:prstGeom prst="ellipse">
@@ -7980,7 +7980,7 @@
           </p:nvSpPr>
           <p:spPr>
             <a:xfrm>
-              <a:off x="5163948" y="4624715"/>
+              <a:off x="3239552" y="4437866"/>
               <a:ext cx="49651" cy="49651"/>
             </a:xfrm>
             <a:prstGeom prst="ellipse">
@@ -8015,7 +8015,7 @@
           </p:nvSpPr>
           <p:spPr>
             <a:xfrm>
-              <a:off x="3239552" y="4437866"/>
+              <a:off x="5294846" y="4625159"/>
               <a:ext cx="49651" cy="49651"/>
             </a:xfrm>
             <a:prstGeom prst="ellipse">
@@ -8050,7 +8050,7 @@
           </p:nvSpPr>
           <p:spPr>
             <a:xfrm>
-              <a:off x="5294846" y="4625159"/>
+              <a:off x="4570701" y="3033369"/>
               <a:ext cx="49651" cy="49651"/>
             </a:xfrm>
             <a:prstGeom prst="ellipse">
@@ -8085,7 +8085,7 @@
           </p:nvSpPr>
           <p:spPr>
             <a:xfrm>
-              <a:off x="4570701" y="3033369"/>
+              <a:off x="3037302" y="4446898"/>
               <a:ext cx="49651" cy="49651"/>
             </a:xfrm>
             <a:prstGeom prst="ellipse">
@@ -8120,7 +8120,7 @@
           </p:nvSpPr>
           <p:spPr>
             <a:xfrm>
-              <a:off x="3037302" y="4446898"/>
+              <a:off x="4086759" y="4723173"/>
               <a:ext cx="49651" cy="49651"/>
             </a:xfrm>
             <a:prstGeom prst="ellipse">
@@ -8155,7 +8155,7 @@
           </p:nvSpPr>
           <p:spPr>
             <a:xfrm>
-              <a:off x="4086759" y="4723173"/>
+              <a:off x="3726454" y="4460497"/>
               <a:ext cx="49651" cy="49651"/>
             </a:xfrm>
             <a:prstGeom prst="ellipse">
@@ -8190,7 +8190,7 @@
           </p:nvSpPr>
           <p:spPr>
             <a:xfrm>
-              <a:off x="3726454" y="4460497"/>
+              <a:off x="5797337" y="4642183"/>
               <a:ext cx="49651" cy="49651"/>
             </a:xfrm>
             <a:prstGeom prst="ellipse">
@@ -8225,7 +8225,7 @@
           </p:nvSpPr>
           <p:spPr>
             <a:xfrm>
-              <a:off x="5797337" y="4642183"/>
+              <a:off x="4916475" y="2889224"/>
               <a:ext cx="49651" cy="49651"/>
             </a:xfrm>
             <a:prstGeom prst="ellipse">
@@ -8260,7 +8260,7 @@
           </p:nvSpPr>
           <p:spPr>
             <a:xfrm>
-              <a:off x="4916475" y="2889224"/>
+              <a:off x="5727472" y="3517888"/>
               <a:ext cx="49651" cy="49651"/>
             </a:xfrm>
             <a:prstGeom prst="ellipse">
@@ -8295,7 +8295,7 @@
           </p:nvSpPr>
           <p:spPr>
             <a:xfrm>
-              <a:off x="5727472" y="3517888"/>
+              <a:off x="4886427" y="3974488"/>
               <a:ext cx="49651" cy="49651"/>
             </a:xfrm>
             <a:prstGeom prst="ellipse">
@@ -8330,7 +8330,7 @@
           </p:nvSpPr>
           <p:spPr>
             <a:xfrm>
-              <a:off x="4886427" y="3974488"/>
+              <a:off x="4796765" y="4721398"/>
               <a:ext cx="49651" cy="49651"/>
             </a:xfrm>
             <a:prstGeom prst="ellipse">
@@ -8365,7 +8365,7 @@
           </p:nvSpPr>
           <p:spPr>
             <a:xfrm>
-              <a:off x="4796765" y="4721398"/>
+              <a:off x="5571142" y="3715943"/>
               <a:ext cx="49651" cy="49651"/>
             </a:xfrm>
             <a:prstGeom prst="ellipse">
@@ -8400,7 +8400,7 @@
           </p:nvSpPr>
           <p:spPr>
             <a:xfrm>
-              <a:off x="5571142" y="3715943"/>
+              <a:off x="5832393" y="4181122"/>
               <a:ext cx="49651" cy="49651"/>
             </a:xfrm>
             <a:prstGeom prst="ellipse">
@@ -8435,7 +8435,7 @@
           </p:nvSpPr>
           <p:spPr>
             <a:xfrm>
-              <a:off x="5832393" y="4181122"/>
+              <a:off x="6947684" y="4445833"/>
               <a:ext cx="49651" cy="49651"/>
             </a:xfrm>
             <a:prstGeom prst="ellipse">
@@ -8470,7 +8470,7 @@
           </p:nvSpPr>
           <p:spPr>
             <a:xfrm>
-              <a:off x="6947684" y="4445833"/>
+              <a:off x="5274300" y="4762480"/>
               <a:ext cx="49651" cy="49651"/>
             </a:xfrm>
             <a:prstGeom prst="ellipse">
@@ -8505,7 +8505,7 @@
           </p:nvSpPr>
           <p:spPr>
             <a:xfrm>
-              <a:off x="5274300" y="4762480"/>
+              <a:off x="2474954" y="3831071"/>
               <a:ext cx="49651" cy="49651"/>
             </a:xfrm>
             <a:prstGeom prst="ellipse">
@@ -8540,7 +8540,7 @@
           </p:nvSpPr>
           <p:spPr>
             <a:xfrm>
-              <a:off x="2474954" y="3831071"/>
+              <a:off x="5398067" y="4325793"/>
               <a:ext cx="49651" cy="49651"/>
             </a:xfrm>
             <a:prstGeom prst="ellipse">
@@ -8575,7 +8575,7 @@
           </p:nvSpPr>
           <p:spPr>
             <a:xfrm>
-              <a:off x="5398067" y="4325793"/>
+              <a:off x="6852546" y="4600590"/>
               <a:ext cx="49651" cy="49651"/>
             </a:xfrm>
             <a:prstGeom prst="ellipse">
@@ -8610,7 +8610,7 @@
           </p:nvSpPr>
           <p:spPr>
             <a:xfrm>
-              <a:off x="6852546" y="4600590"/>
+              <a:off x="4611698" y="4490617"/>
               <a:ext cx="49651" cy="49651"/>
             </a:xfrm>
             <a:prstGeom prst="ellipse">
@@ -8645,7 +8645,7 @@
           </p:nvSpPr>
           <p:spPr>
             <a:xfrm>
-              <a:off x="4611698" y="4490617"/>
+              <a:off x="4045072" y="3898825"/>
               <a:ext cx="49651" cy="49651"/>
             </a:xfrm>
             <a:prstGeom prst="ellipse">
@@ -8680,7 +8680,7 @@
           </p:nvSpPr>
           <p:spPr>
             <a:xfrm>
-              <a:off x="4045072" y="3898825"/>
+              <a:off x="6776466" y="5038214"/>
               <a:ext cx="49651" cy="49651"/>
             </a:xfrm>
             <a:prstGeom prst="ellipse">
@@ -8715,7 +8715,7 @@
           </p:nvSpPr>
           <p:spPr>
             <a:xfrm>
-              <a:off x="6776466" y="5038214"/>
+              <a:off x="7061034" y="4445833"/>
               <a:ext cx="49651" cy="49651"/>
             </a:xfrm>
             <a:prstGeom prst="ellipse">
@@ -8750,7 +8750,7 @@
           </p:nvSpPr>
           <p:spPr>
             <a:xfrm>
-              <a:off x="7061034" y="4445833"/>
+              <a:off x="3899131" y="3528419"/>
               <a:ext cx="49651" cy="49651"/>
             </a:xfrm>
             <a:prstGeom prst="ellipse">
@@ -8785,7 +8785,7 @@
           </p:nvSpPr>
           <p:spPr>
             <a:xfrm>
-              <a:off x="3899131" y="3528419"/>
+              <a:off x="3439077" y="4654316"/>
               <a:ext cx="49651" cy="49651"/>
             </a:xfrm>
             <a:prstGeom prst="ellipse">
@@ -8820,7 +8820,7 @@
           </p:nvSpPr>
           <p:spPr>
             <a:xfrm>
-              <a:off x="3439077" y="4654316"/>
+              <a:off x="5688120" y="4544653"/>
               <a:ext cx="49651" cy="49651"/>
             </a:xfrm>
             <a:prstGeom prst="ellipse">
@@ -8855,7 +8855,7 @@
           </p:nvSpPr>
           <p:spPr>
             <a:xfrm>
-              <a:off x="5688120" y="4544653"/>
+              <a:off x="4708913" y="5237120"/>
               <a:ext cx="49651" cy="49651"/>
             </a:xfrm>
             <a:prstGeom prst="ellipse">
@@ -8890,7 +8890,7 @@
           </p:nvSpPr>
           <p:spPr>
             <a:xfrm>
-              <a:off x="4708913" y="5237120"/>
+              <a:off x="8218850" y="4445833"/>
               <a:ext cx="49651" cy="49651"/>
             </a:xfrm>
             <a:prstGeom prst="ellipse">
@@ -8925,7 +8925,7 @@
           </p:nvSpPr>
           <p:spPr>
             <a:xfrm>
-              <a:off x="8218850" y="4445833"/>
+              <a:off x="2112189" y="3430954"/>
               <a:ext cx="49651" cy="49651"/>
             </a:xfrm>
             <a:prstGeom prst="ellipse">
@@ -8960,7 +8960,7 @@
           </p:nvSpPr>
           <p:spPr>
             <a:xfrm>
-              <a:off x="2112189" y="3430954"/>
+              <a:off x="1301453" y="4404523"/>
               <a:ext cx="49651" cy="49651"/>
             </a:xfrm>
             <a:prstGeom prst="ellipse">
@@ -8995,7 +8995,7 @@
           </p:nvSpPr>
           <p:spPr>
             <a:xfrm>
-              <a:off x="1301453" y="4404523"/>
+              <a:off x="5921206" y="4186577"/>
               <a:ext cx="49651" cy="49651"/>
             </a:xfrm>
             <a:prstGeom prst="ellipse">
@@ -9030,7 +9030,7 @@
           </p:nvSpPr>
           <p:spPr>
             <a:xfrm>
-              <a:off x="5921206" y="4186577"/>
+              <a:off x="4030321" y="4772366"/>
               <a:ext cx="49651" cy="49651"/>
             </a:xfrm>
             <a:prstGeom prst="ellipse">
@@ -9065,7 +9065,7 @@
           </p:nvSpPr>
           <p:spPr>
             <a:xfrm>
-              <a:off x="4030321" y="4772366"/>
+              <a:off x="6054352" y="5367467"/>
               <a:ext cx="49651" cy="49651"/>
             </a:xfrm>
             <a:prstGeom prst="ellipse">
@@ -9100,7 +9100,7 @@
           </p:nvSpPr>
           <p:spPr>
             <a:xfrm>
-              <a:off x="6054352" y="5367467"/>
+              <a:off x="6222109" y="3901318"/>
               <a:ext cx="49651" cy="49651"/>
             </a:xfrm>
             <a:prstGeom prst="ellipse">
@@ -9135,7 +9135,7 @@
           </p:nvSpPr>
           <p:spPr>
             <a:xfrm>
-              <a:off x="6222109" y="3901318"/>
+              <a:off x="5146745" y="4533276"/>
               <a:ext cx="49651" cy="49651"/>
             </a:xfrm>
             <a:prstGeom prst="ellipse">
@@ -9170,7 +9170,7 @@
           </p:nvSpPr>
           <p:spPr>
             <a:xfrm>
-              <a:off x="5146745" y="4533276"/>
+              <a:off x="7032738" y="4817603"/>
               <a:ext cx="49651" cy="49651"/>
             </a:xfrm>
             <a:prstGeom prst="ellipse">
@@ -9205,7 +9205,7 @@
           </p:nvSpPr>
           <p:spPr>
             <a:xfrm>
-              <a:off x="7032738" y="4817603"/>
+              <a:off x="8245197" y="4445833"/>
               <a:ext cx="49651" cy="49651"/>
             </a:xfrm>
             <a:prstGeom prst="ellipse">
@@ -9240,7 +9240,7 @@
           </p:nvSpPr>
           <p:spPr>
             <a:xfrm>
-              <a:off x="8245197" y="4445833"/>
+              <a:off x="4181300" y="4849148"/>
               <a:ext cx="49651" cy="49651"/>
             </a:xfrm>
             <a:prstGeom prst="ellipse">
@@ -9275,7 +9275,7 @@
           </p:nvSpPr>
           <p:spPr>
             <a:xfrm>
-              <a:off x="4181300" y="4849148"/>
+              <a:off x="7012431" y="4445833"/>
               <a:ext cx="49651" cy="49651"/>
             </a:xfrm>
             <a:prstGeom prst="ellipse">
@@ -9310,7 +9310,7 @@
           </p:nvSpPr>
           <p:spPr>
             <a:xfrm>
-              <a:off x="7012431" y="4445833"/>
+              <a:off x="3708846" y="4396179"/>
               <a:ext cx="49651" cy="49651"/>
             </a:xfrm>
             <a:prstGeom prst="ellipse">
@@ -9345,7 +9345,7 @@
           </p:nvSpPr>
           <p:spPr>
             <a:xfrm>
-              <a:off x="3708846" y="4396179"/>
+              <a:off x="5364383" y="4795669"/>
               <a:ext cx="49651" cy="49651"/>
             </a:xfrm>
             <a:prstGeom prst="ellipse">
@@ -9380,7 +9380,7 @@
           </p:nvSpPr>
           <p:spPr>
             <a:xfrm>
-              <a:off x="5364383" y="4795669"/>
+              <a:off x="5837780" y="4662134"/>
               <a:ext cx="49651" cy="49651"/>
             </a:xfrm>
             <a:prstGeom prst="ellipse">
@@ -9415,7 +9415,7 @@
           </p:nvSpPr>
           <p:spPr>
             <a:xfrm>
-              <a:off x="5837780" y="4662134"/>
+              <a:off x="4599843" y="4446899"/>
               <a:ext cx="49651" cy="49651"/>
             </a:xfrm>
             <a:prstGeom prst="ellipse">
@@ -9450,7 +9450,7 @@
           </p:nvSpPr>
           <p:spPr>
             <a:xfrm>
-              <a:off x="4599843" y="4446899"/>
+              <a:off x="7452844" y="4445833"/>
               <a:ext cx="49651" cy="49651"/>
             </a:xfrm>
             <a:prstGeom prst="ellipse">
@@ -9485,7 +9485,7 @@
           </p:nvSpPr>
           <p:spPr>
             <a:xfrm>
-              <a:off x="7452844" y="4445833"/>
+              <a:off x="7834986" y="4445833"/>
               <a:ext cx="49651" cy="49651"/>
             </a:xfrm>
             <a:prstGeom prst="ellipse">
@@ -9520,7 +9520,7 @@
           </p:nvSpPr>
           <p:spPr>
             <a:xfrm>
-              <a:off x="7834986" y="4445833"/>
+              <a:off x="5627318" y="4194437"/>
               <a:ext cx="49651" cy="49651"/>
             </a:xfrm>
             <a:prstGeom prst="ellipse">
@@ -9555,7 +9555,7 @@
           </p:nvSpPr>
           <p:spPr>
             <a:xfrm>
-              <a:off x="5627318" y="4194437"/>
+              <a:off x="5084091" y="4439028"/>
               <a:ext cx="49651" cy="49651"/>
             </a:xfrm>
             <a:prstGeom prst="ellipse">
@@ -9590,7 +9590,7 @@
           </p:nvSpPr>
           <p:spPr>
             <a:xfrm>
-              <a:off x="5084091" y="4439028"/>
+              <a:off x="4878630" y="4428189"/>
               <a:ext cx="49651" cy="49651"/>
             </a:xfrm>
             <a:prstGeom prst="ellipse">
@@ -9625,41 +9625,6 @@
           </p:nvSpPr>
           <p:spPr>
             <a:xfrm>
-              <a:off x="4878630" y="4428189"/>
-              <a:ext cx="49651" cy="49651"/>
-            </a:xfrm>
-            <a:prstGeom prst="ellipse">
-              <a:avLst/>
-            </a:prstGeom>
-            <a:solidFill>
-              <a:srgbClr val="000000">
-                <a:alpha val="29803"/>
-              </a:srgbClr>
-            </a:solidFill>
-            <a:ln w="9000" cap="rnd">
-              <a:solidFill>
-                <a:srgbClr val="000000">
-                  <a:alpha val="29803"/>
-                </a:srgbClr>
-              </a:solidFill>
-              <a:prstDash val="solid"/>
-              <a:round/>
-            </a:ln>
-          </p:spPr>
-          <p:txBody>
-            <a:bodyPr/>
-            <a:lstStyle/>
-            <a:p/>
-          </p:txBody>
-        </p:sp>
-        <p:sp>
-          <p:nvSpPr>
-            <p:cNvPr id="211" name="pt211"/>
-            <p:cNvSpPr/>
-            <p:nvPr/>
-          </p:nvSpPr>
-          <p:spPr>
-            <a:xfrm>
               <a:off x="5378386" y="3821105"/>
               <a:ext cx="49651" cy="49651"/>
             </a:xfrm>
@@ -9689,498 +9654,498 @@
         </p:sp>
         <p:sp>
           <p:nvSpPr>
-            <p:cNvPr id="212" name="pg212"/>
-            <p:cNvSpPr/>
-            <p:nvPr/>
-          </p:nvSpPr>
-          <p:spPr>
-            <a:xfrm>
-              <a:off x="1326279" y="4146987"/>
-              <a:ext cx="6943744" cy="672741"/>
+            <p:cNvPr id="211" name="pg211"/>
+            <p:cNvSpPr/>
+            <p:nvPr/>
+          </p:nvSpPr>
+          <p:spPr>
+            <a:xfrm>
+              <a:off x="1326279" y="4158378"/>
+              <a:ext cx="6943744" cy="655137"/>
             </a:xfrm>
             <a:custGeom>
               <a:avLst/>
               <a:pathLst>
-                <a:path w="6943744" h="672741">
+                <a:path w="6943744" h="655137">
                   <a:moveTo>
                     <a:pt x="0" y="0"/>
                   </a:moveTo>
                   <a:lnTo>
-                    <a:pt x="87895" y="7922"/>
-                  </a:lnTo>
-                  <a:lnTo>
-                    <a:pt x="175790" y="15832"/>
-                  </a:lnTo>
-                  <a:lnTo>
-                    <a:pt x="263686" y="23729"/>
-                  </a:lnTo>
-                  <a:lnTo>
-                    <a:pt x="351581" y="31611"/>
-                  </a:lnTo>
-                  <a:lnTo>
-                    <a:pt x="439477" y="39479"/>
-                  </a:lnTo>
-                  <a:lnTo>
-                    <a:pt x="527372" y="47331"/>
-                  </a:lnTo>
-                  <a:lnTo>
-                    <a:pt x="615268" y="55166"/>
-                  </a:lnTo>
-                  <a:lnTo>
-                    <a:pt x="703163" y="62982"/>
-                  </a:lnTo>
-                  <a:lnTo>
-                    <a:pt x="791059" y="70778"/>
-                  </a:lnTo>
-                  <a:lnTo>
-                    <a:pt x="878954" y="78553"/>
-                  </a:lnTo>
-                  <a:lnTo>
-                    <a:pt x="966850" y="86305"/>
-                  </a:lnTo>
-                  <a:lnTo>
-                    <a:pt x="1054745" y="94031"/>
-                  </a:lnTo>
-                  <a:lnTo>
-                    <a:pt x="1142641" y="101731"/>
-                  </a:lnTo>
-                  <a:lnTo>
-                    <a:pt x="1230536" y="109401"/>
-                  </a:lnTo>
-                  <a:lnTo>
-                    <a:pt x="1318432" y="117039"/>
-                  </a:lnTo>
-                  <a:lnTo>
-                    <a:pt x="1406327" y="124642"/>
-                  </a:lnTo>
-                  <a:lnTo>
-                    <a:pt x="1494223" y="132208"/>
-                  </a:lnTo>
-                  <a:lnTo>
-                    <a:pt x="1582118" y="139732"/>
-                  </a:lnTo>
-                  <a:lnTo>
-                    <a:pt x="1670014" y="147210"/>
-                  </a:lnTo>
-                  <a:lnTo>
-                    <a:pt x="1757909" y="154639"/>
-                  </a:lnTo>
-                  <a:lnTo>
-                    <a:pt x="1845805" y="162014"/>
-                  </a:lnTo>
-                  <a:lnTo>
-                    <a:pt x="1933700" y="169328"/>
-                  </a:lnTo>
-                  <a:lnTo>
-                    <a:pt x="2021596" y="176576"/>
-                  </a:lnTo>
-                  <a:lnTo>
-                    <a:pt x="2109491" y="183751"/>
-                  </a:lnTo>
-                  <a:lnTo>
-                    <a:pt x="2197387" y="190845"/>
-                  </a:lnTo>
-                  <a:lnTo>
-                    <a:pt x="2285282" y="197850"/>
-                  </a:lnTo>
-                  <a:lnTo>
-                    <a:pt x="2373178" y="204756"/>
-                  </a:lnTo>
-                  <a:lnTo>
-                    <a:pt x="2461073" y="211553"/>
-                  </a:lnTo>
-                  <a:lnTo>
-                    <a:pt x="2548969" y="218227"/>
-                  </a:lnTo>
-                  <a:lnTo>
-                    <a:pt x="2636864" y="224766"/>
-                  </a:lnTo>
-                  <a:lnTo>
-                    <a:pt x="2724760" y="231156"/>
-                  </a:lnTo>
-                  <a:lnTo>
-                    <a:pt x="2812655" y="237380"/>
-                  </a:lnTo>
-                  <a:lnTo>
-                    <a:pt x="2900551" y="243420"/>
-                  </a:lnTo>
-                  <a:lnTo>
-                    <a:pt x="2988446" y="249259"/>
-                  </a:lnTo>
-                  <a:lnTo>
-                    <a:pt x="3076342" y="254876"/>
-                  </a:lnTo>
-                  <a:lnTo>
-                    <a:pt x="3164237" y="260252"/>
-                  </a:lnTo>
-                  <a:lnTo>
-                    <a:pt x="3252133" y="265365"/>
-                  </a:lnTo>
-                  <a:lnTo>
-                    <a:pt x="3340028" y="270197"/>
-                  </a:lnTo>
-                  <a:lnTo>
-                    <a:pt x="3427924" y="274729"/>
-                  </a:lnTo>
-                  <a:lnTo>
-                    <a:pt x="3515819" y="278945"/>
-                  </a:lnTo>
-                  <a:lnTo>
-                    <a:pt x="3603715" y="282831"/>
-                  </a:lnTo>
-                  <a:lnTo>
-                    <a:pt x="3691610" y="286380"/>
-                  </a:lnTo>
-                  <a:lnTo>
-                    <a:pt x="3779506" y="289586"/>
-                  </a:lnTo>
-                  <a:lnTo>
-                    <a:pt x="3867401" y="292449"/>
-                  </a:lnTo>
-                  <a:lnTo>
-                    <a:pt x="3955297" y="294975"/>
-                  </a:lnTo>
-                  <a:lnTo>
-                    <a:pt x="4043192" y="297174"/>
-                  </a:lnTo>
-                  <a:lnTo>
-                    <a:pt x="4131088" y="299059"/>
-                  </a:lnTo>
-                  <a:lnTo>
-                    <a:pt x="4218983" y="300647"/>
-                  </a:lnTo>
-                  <a:lnTo>
-                    <a:pt x="4306879" y="301955"/>
-                  </a:lnTo>
-                  <a:lnTo>
-                    <a:pt x="4394774" y="303005"/>
-                  </a:lnTo>
-                  <a:lnTo>
-                    <a:pt x="4482670" y="303816"/>
-                  </a:lnTo>
-                  <a:lnTo>
-                    <a:pt x="4570565" y="304408"/>
-                  </a:lnTo>
-                  <a:lnTo>
-                    <a:pt x="4658461" y="304802"/>
-                  </a:lnTo>
-                  <a:lnTo>
-                    <a:pt x="4746356" y="305015"/>
-                  </a:lnTo>
-                  <a:lnTo>
-                    <a:pt x="4834252" y="305064"/>
-                  </a:lnTo>
-                  <a:lnTo>
-                    <a:pt x="4922147" y="304966"/>
-                  </a:lnTo>
-                  <a:lnTo>
-                    <a:pt x="5010043" y="304735"/>
-                  </a:lnTo>
-                  <a:lnTo>
-                    <a:pt x="5097938" y="304384"/>
-                  </a:lnTo>
-                  <a:lnTo>
-                    <a:pt x="5185834" y="303925"/>
-                  </a:lnTo>
-                  <a:lnTo>
-                    <a:pt x="5273729" y="303369"/>
-                  </a:lnTo>
-                  <a:lnTo>
-                    <a:pt x="5361625" y="302724"/>
-                  </a:lnTo>
-                  <a:lnTo>
-                    <a:pt x="5449520" y="302000"/>
-                  </a:lnTo>
-                  <a:lnTo>
-                    <a:pt x="5537416" y="301203"/>
-                  </a:lnTo>
-                  <a:lnTo>
-                    <a:pt x="5625311" y="300342"/>
-                  </a:lnTo>
-                  <a:lnTo>
-                    <a:pt x="5713207" y="299421"/>
-                  </a:lnTo>
-                  <a:lnTo>
-                    <a:pt x="5801102" y="298447"/>
-                  </a:lnTo>
-                  <a:lnTo>
-                    <a:pt x="5888998" y="297423"/>
-                  </a:lnTo>
-                  <a:lnTo>
-                    <a:pt x="5976893" y="296355"/>
-                  </a:lnTo>
-                  <a:lnTo>
-                    <a:pt x="6064789" y="295246"/>
-                  </a:lnTo>
-                  <a:lnTo>
-                    <a:pt x="6152684" y="294099"/>
-                  </a:lnTo>
-                  <a:lnTo>
-                    <a:pt x="6240580" y="292918"/>
-                  </a:lnTo>
-                  <a:lnTo>
-                    <a:pt x="6328475" y="291706"/>
-                  </a:lnTo>
-                  <a:lnTo>
-                    <a:pt x="6416371" y="290464"/>
-                  </a:lnTo>
-                  <a:lnTo>
-                    <a:pt x="6504266" y="289196"/>
-                  </a:lnTo>
-                  <a:lnTo>
-                    <a:pt x="6592162" y="287903"/>
-                  </a:lnTo>
-                  <a:lnTo>
-                    <a:pt x="6680057" y="286587"/>
-                  </a:lnTo>
-                  <a:lnTo>
-                    <a:pt x="6767953" y="285250"/>
-                  </a:lnTo>
-                  <a:lnTo>
-                    <a:pt x="6855848" y="283893"/>
-                  </a:lnTo>
-                  <a:lnTo>
-                    <a:pt x="6943744" y="282518"/>
-                  </a:lnTo>
-                  <a:lnTo>
-                    <a:pt x="6943744" y="672741"/>
-                  </a:lnTo>
-                  <a:lnTo>
-                    <a:pt x="6855848" y="664904"/>
-                  </a:lnTo>
-                  <a:lnTo>
-                    <a:pt x="6767953" y="657085"/>
-                  </a:lnTo>
-                  <a:lnTo>
-                    <a:pt x="6680057" y="649286"/>
-                  </a:lnTo>
-                  <a:lnTo>
-                    <a:pt x="6592162" y="641508"/>
-                  </a:lnTo>
-                  <a:lnTo>
-                    <a:pt x="6504266" y="633753"/>
-                  </a:lnTo>
-                  <a:lnTo>
-                    <a:pt x="6416371" y="626022"/>
-                  </a:lnTo>
-                  <a:lnTo>
-                    <a:pt x="6328475" y="618319"/>
-                  </a:lnTo>
-                  <a:lnTo>
-                    <a:pt x="6240580" y="610644"/>
-                  </a:lnTo>
-                  <a:lnTo>
-                    <a:pt x="6152684" y="603001"/>
-                  </a:lnTo>
-                  <a:lnTo>
-                    <a:pt x="6064789" y="595392"/>
-                  </a:lnTo>
-                  <a:lnTo>
-                    <a:pt x="5976893" y="587821"/>
-                  </a:lnTo>
-                  <a:lnTo>
-                    <a:pt x="5888998" y="580291"/>
-                  </a:lnTo>
-                  <a:lnTo>
-                    <a:pt x="5801102" y="572805"/>
-                  </a:lnTo>
-                  <a:lnTo>
-                    <a:pt x="5713207" y="565369"/>
-                  </a:lnTo>
-                  <a:lnTo>
-                    <a:pt x="5625311" y="557986"/>
-                  </a:lnTo>
-                  <a:lnTo>
-                    <a:pt x="5537416" y="550663"/>
-                  </a:lnTo>
-                  <a:lnTo>
-                    <a:pt x="5449520" y="543404"/>
-                  </a:lnTo>
-                  <a:lnTo>
-                    <a:pt x="5361625" y="536218"/>
-                  </a:lnTo>
-                  <a:lnTo>
-                    <a:pt x="5273729" y="529111"/>
-                  </a:lnTo>
-                  <a:lnTo>
-                    <a:pt x="5185834" y="522093"/>
-                  </a:lnTo>
-                  <a:lnTo>
-                    <a:pt x="5097938" y="515171"/>
-                  </a:lnTo>
-                  <a:lnTo>
-                    <a:pt x="5010043" y="508358"/>
-                  </a:lnTo>
-                  <a:lnTo>
-                    <a:pt x="4922147" y="501665"/>
-                  </a:lnTo>
-                  <a:lnTo>
-                    <a:pt x="4834252" y="495105"/>
-                  </a:lnTo>
-                  <a:lnTo>
-                    <a:pt x="4746356" y="488693"/>
-                  </a:lnTo>
-                  <a:lnTo>
-                    <a:pt x="4658461" y="482443"/>
-                  </a:lnTo>
-                  <a:lnTo>
-                    <a:pt x="4570565" y="476375"/>
-                  </a:lnTo>
-                  <a:lnTo>
-                    <a:pt x="4482670" y="470505"/>
-                  </a:lnTo>
-                  <a:lnTo>
-                    <a:pt x="4394774" y="464854"/>
-                  </a:lnTo>
-                  <a:lnTo>
-                    <a:pt x="4306879" y="459442"/>
-                  </a:lnTo>
-                  <a:lnTo>
-                    <a:pt x="4218983" y="454288"/>
-                  </a:lnTo>
-                  <a:lnTo>
-                    <a:pt x="4131088" y="449414"/>
-                  </a:lnTo>
-                  <a:lnTo>
-                    <a:pt x="4043192" y="444837"/>
-                  </a:lnTo>
-                  <a:lnTo>
-                    <a:pt x="3955297" y="440573"/>
-                  </a:lnTo>
-                  <a:lnTo>
-                    <a:pt x="3867401" y="436638"/>
-                  </a:lnTo>
-                  <a:lnTo>
-                    <a:pt x="3779506" y="433039"/>
-                  </a:lnTo>
-                  <a:lnTo>
-                    <a:pt x="3691610" y="429783"/>
-                  </a:lnTo>
-                  <a:lnTo>
-                    <a:pt x="3603715" y="426869"/>
-                  </a:lnTo>
-                  <a:lnTo>
-                    <a:pt x="3515819" y="424294"/>
-                  </a:lnTo>
-                  <a:lnTo>
-                    <a:pt x="3427924" y="422047"/>
-                  </a:lnTo>
-                  <a:lnTo>
-                    <a:pt x="3340028" y="420117"/>
-                  </a:lnTo>
-                  <a:lnTo>
-                    <a:pt x="3252133" y="418487"/>
-                  </a:lnTo>
-                  <a:lnTo>
-                    <a:pt x="3164237" y="417139"/>
-                  </a:lnTo>
-                  <a:lnTo>
-                    <a:pt x="3076342" y="416052"/>
-                  </a:lnTo>
-                  <a:lnTo>
-                    <a:pt x="2988446" y="415208"/>
-                  </a:lnTo>
-                  <a:lnTo>
-                    <a:pt x="2900551" y="414584"/>
-                  </a:lnTo>
-                  <a:lnTo>
-                    <a:pt x="2812655" y="414163"/>
-                  </a:lnTo>
-                  <a:lnTo>
-                    <a:pt x="2724760" y="413924"/>
-                  </a:lnTo>
-                  <a:lnTo>
-                    <a:pt x="2636864" y="413852"/>
-                  </a:lnTo>
-                  <a:lnTo>
-                    <a:pt x="2548969" y="413929"/>
-                  </a:lnTo>
-                  <a:lnTo>
-                    <a:pt x="2461073" y="414141"/>
-                  </a:lnTo>
-                  <a:lnTo>
-                    <a:pt x="2373178" y="414475"/>
-                  </a:lnTo>
-                  <a:lnTo>
-                    <a:pt x="2285282" y="414919"/>
-                  </a:lnTo>
-                  <a:lnTo>
-                    <a:pt x="2197387" y="415462"/>
-                  </a:lnTo>
-                  <a:lnTo>
-                    <a:pt x="2109491" y="416095"/>
-                  </a:lnTo>
-                  <a:lnTo>
-                    <a:pt x="2021596" y="416808"/>
-                  </a:lnTo>
-                  <a:lnTo>
-                    <a:pt x="1933700" y="417594"/>
-                  </a:lnTo>
-                  <a:lnTo>
-                    <a:pt x="1845805" y="418446"/>
-                  </a:lnTo>
-                  <a:lnTo>
-                    <a:pt x="1757909" y="419358"/>
-                  </a:lnTo>
-                  <a:lnTo>
-                    <a:pt x="1670014" y="420325"/>
-                  </a:lnTo>
-                  <a:lnTo>
-                    <a:pt x="1582118" y="421342"/>
-                  </a:lnTo>
-                  <a:lnTo>
-                    <a:pt x="1494223" y="422403"/>
-                  </a:lnTo>
-                  <a:lnTo>
-                    <a:pt x="1406327" y="423507"/>
-                  </a:lnTo>
-                  <a:lnTo>
-                    <a:pt x="1318432" y="424648"/>
-                  </a:lnTo>
-                  <a:lnTo>
-                    <a:pt x="1230536" y="425824"/>
-                  </a:lnTo>
-                  <a:lnTo>
-                    <a:pt x="1142641" y="427032"/>
-                  </a:lnTo>
-                  <a:lnTo>
-                    <a:pt x="1054745" y="428270"/>
-                  </a:lnTo>
-                  <a:lnTo>
-                    <a:pt x="966850" y="429534"/>
-                  </a:lnTo>
-                  <a:lnTo>
-                    <a:pt x="878954" y="430824"/>
-                  </a:lnTo>
-                  <a:lnTo>
-                    <a:pt x="791059" y="432136"/>
-                  </a:lnTo>
-                  <a:lnTo>
-                    <a:pt x="703163" y="433471"/>
-                  </a:lnTo>
-                  <a:lnTo>
-                    <a:pt x="615268" y="434825"/>
-                  </a:lnTo>
-                  <a:lnTo>
-                    <a:pt x="527372" y="436197"/>
-                  </a:lnTo>
-                  <a:lnTo>
-                    <a:pt x="439477" y="437587"/>
-                  </a:lnTo>
-                  <a:lnTo>
-                    <a:pt x="351581" y="438993"/>
-                  </a:lnTo>
-                  <a:lnTo>
-                    <a:pt x="263686" y="440414"/>
-                  </a:lnTo>
-                  <a:lnTo>
-                    <a:pt x="175790" y="441849"/>
-                  </a:lnTo>
-                  <a:lnTo>
-                    <a:pt x="87895" y="443297"/>
-                  </a:lnTo>
-                  <a:lnTo>
-                    <a:pt x="0" y="444757"/>
+                    <a:pt x="87895" y="7700"/>
+                  </a:lnTo>
+                  <a:lnTo>
+                    <a:pt x="175790" y="15388"/>
+                  </a:lnTo>
+                  <a:lnTo>
+                    <a:pt x="263686" y="23064"/>
+                  </a:lnTo>
+                  <a:lnTo>
+                    <a:pt x="351581" y="30725"/>
+                  </a:lnTo>
+                  <a:lnTo>
+                    <a:pt x="439477" y="38372"/>
+                  </a:lnTo>
+                  <a:lnTo>
+                    <a:pt x="527372" y="46002"/>
+                  </a:lnTo>
+                  <a:lnTo>
+                    <a:pt x="615268" y="53616"/>
+                  </a:lnTo>
+                  <a:lnTo>
+                    <a:pt x="703163" y="61211"/>
+                  </a:lnTo>
+                  <a:lnTo>
+                    <a:pt x="791059" y="68787"/>
+                  </a:lnTo>
+                  <a:lnTo>
+                    <a:pt x="878954" y="76341"/>
+                  </a:lnTo>
+                  <a:lnTo>
+                    <a:pt x="966850" y="83872"/>
+                  </a:lnTo>
+                  <a:lnTo>
+                    <a:pt x="1054745" y="91378"/>
+                  </a:lnTo>
+                  <a:lnTo>
+                    <a:pt x="1142641" y="98857"/>
+                  </a:lnTo>
+                  <a:lnTo>
+                    <a:pt x="1230536" y="106308"/>
+                  </a:lnTo>
+                  <a:lnTo>
+                    <a:pt x="1318432" y="113726"/>
+                  </a:lnTo>
+                  <a:lnTo>
+                    <a:pt x="1406327" y="121110"/>
+                  </a:lnTo>
+                  <a:lnTo>
+                    <a:pt x="1494223" y="128456"/>
+                  </a:lnTo>
+                  <a:lnTo>
+                    <a:pt x="1582118" y="135762"/>
+                  </a:lnTo>
+                  <a:lnTo>
+                    <a:pt x="1670014" y="143022"/>
+                  </a:lnTo>
+                  <a:lnTo>
+                    <a:pt x="1757909" y="150233"/>
+                  </a:lnTo>
+                  <a:lnTo>
+                    <a:pt x="1845805" y="157390"/>
+                  </a:lnTo>
+                  <a:lnTo>
+                    <a:pt x="1933700" y="164487"/>
+                  </a:lnTo>
+                  <a:lnTo>
+                    <a:pt x="2021596" y="171518"/>
+                  </a:lnTo>
+                  <a:lnTo>
+                    <a:pt x="2109491" y="178478"/>
+                  </a:lnTo>
+                  <a:lnTo>
+                    <a:pt x="2197387" y="185357"/>
+                  </a:lnTo>
+                  <a:lnTo>
+                    <a:pt x="2285282" y="192147"/>
+                  </a:lnTo>
+                  <a:lnTo>
+                    <a:pt x="2373178" y="198839"/>
+                  </a:lnTo>
+                  <a:lnTo>
+                    <a:pt x="2461073" y="205422"/>
+                  </a:lnTo>
+                  <a:lnTo>
+                    <a:pt x="2548969" y="211885"/>
+                  </a:lnTo>
+                  <a:lnTo>
+                    <a:pt x="2636864" y="218213"/>
+                  </a:lnTo>
+                  <a:lnTo>
+                    <a:pt x="2724760" y="224392"/>
+                  </a:lnTo>
+                  <a:lnTo>
+                    <a:pt x="2812655" y="230406"/>
+                  </a:lnTo>
+                  <a:lnTo>
+                    <a:pt x="2900551" y="236238"/>
+                  </a:lnTo>
+                  <a:lnTo>
+                    <a:pt x="2988446" y="241869"/>
+                  </a:lnTo>
+                  <a:lnTo>
+                    <a:pt x="3076342" y="247280"/>
+                  </a:lnTo>
+                  <a:lnTo>
+                    <a:pt x="3164237" y="252449"/>
+                  </a:lnTo>
+                  <a:lnTo>
+                    <a:pt x="3252133" y="257357"/>
+                  </a:lnTo>
+                  <a:lnTo>
+                    <a:pt x="3340028" y="261982"/>
+                  </a:lnTo>
+                  <a:lnTo>
+                    <a:pt x="3427924" y="266308"/>
+                  </a:lnTo>
+                  <a:lnTo>
+                    <a:pt x="3515819" y="270315"/>
+                  </a:lnTo>
+                  <a:lnTo>
+                    <a:pt x="3603715" y="273992"/>
+                  </a:lnTo>
+                  <a:lnTo>
+                    <a:pt x="3691610" y="277329"/>
+                  </a:lnTo>
+                  <a:lnTo>
+                    <a:pt x="3779506" y="280319"/>
+                  </a:lnTo>
+                  <a:lnTo>
+                    <a:pt x="3867401" y="282964"/>
+                  </a:lnTo>
+                  <a:lnTo>
+                    <a:pt x="3955297" y="285268"/>
+                  </a:lnTo>
+                  <a:lnTo>
+                    <a:pt x="4043192" y="287240"/>
+                  </a:lnTo>
+                  <a:lnTo>
+                    <a:pt x="4131088" y="288893"/>
+                  </a:lnTo>
+                  <a:lnTo>
+                    <a:pt x="4218983" y="290244"/>
+                  </a:lnTo>
+                  <a:lnTo>
+                    <a:pt x="4306879" y="291312"/>
+                  </a:lnTo>
+                  <a:lnTo>
+                    <a:pt x="4394774" y="292116"/>
+                  </a:lnTo>
+                  <a:lnTo>
+                    <a:pt x="4482670" y="292678"/>
+                  </a:lnTo>
+                  <a:lnTo>
+                    <a:pt x="4570565" y="293017"/>
+                  </a:lnTo>
+                  <a:lnTo>
+                    <a:pt x="4658461" y="293154"/>
+                  </a:lnTo>
+                  <a:lnTo>
+                    <a:pt x="4746356" y="293107"/>
+                  </a:lnTo>
+                  <a:lnTo>
+                    <a:pt x="4834252" y="292894"/>
+                  </a:lnTo>
+                  <a:lnTo>
+                    <a:pt x="4922147" y="292531"/>
+                  </a:lnTo>
+                  <a:lnTo>
+                    <a:pt x="5010043" y="292033"/>
+                  </a:lnTo>
+                  <a:lnTo>
+                    <a:pt x="5097938" y="291412"/>
+                  </a:lnTo>
+                  <a:lnTo>
+                    <a:pt x="5185834" y="290682"/>
+                  </a:lnTo>
+                  <a:lnTo>
+                    <a:pt x="5273729" y="289852"/>
+                  </a:lnTo>
+                  <a:lnTo>
+                    <a:pt x="5361625" y="288934"/>
+                  </a:lnTo>
+                  <a:lnTo>
+                    <a:pt x="5449520" y="287934"/>
+                  </a:lnTo>
+                  <a:lnTo>
+                    <a:pt x="5537416" y="286862"/>
+                  </a:lnTo>
+                  <a:lnTo>
+                    <a:pt x="5625311" y="285723"/>
+                  </a:lnTo>
+                  <a:lnTo>
+                    <a:pt x="5713207" y="284524"/>
+                  </a:lnTo>
+                  <a:lnTo>
+                    <a:pt x="5801102" y="283271"/>
+                  </a:lnTo>
+                  <a:lnTo>
+                    <a:pt x="5888998" y="281968"/>
+                  </a:lnTo>
+                  <a:lnTo>
+                    <a:pt x="5976893" y="280620"/>
+                  </a:lnTo>
+                  <a:lnTo>
+                    <a:pt x="6064789" y="279230"/>
+                  </a:lnTo>
+                  <a:lnTo>
+                    <a:pt x="6152684" y="277802"/>
+                  </a:lnTo>
+                  <a:lnTo>
+                    <a:pt x="6240580" y="276340"/>
+                  </a:lnTo>
+                  <a:lnTo>
+                    <a:pt x="6328475" y="274846"/>
+                  </a:lnTo>
+                  <a:lnTo>
+                    <a:pt x="6416371" y="273322"/>
+                  </a:lnTo>
+                  <a:lnTo>
+                    <a:pt x="6504266" y="271772"/>
+                  </a:lnTo>
+                  <a:lnTo>
+                    <a:pt x="6592162" y="270196"/>
+                  </a:lnTo>
+                  <a:lnTo>
+                    <a:pt x="6680057" y="268597"/>
+                  </a:lnTo>
+                  <a:lnTo>
+                    <a:pt x="6767953" y="266977"/>
+                  </a:lnTo>
+                  <a:lnTo>
+                    <a:pt x="6855848" y="265337"/>
+                  </a:lnTo>
+                  <a:lnTo>
+                    <a:pt x="6943744" y="263678"/>
+                  </a:lnTo>
+                  <a:lnTo>
+                    <a:pt x="6943744" y="655137"/>
+                  </a:lnTo>
+                  <a:lnTo>
+                    <a:pt x="6855848" y="647525"/>
+                  </a:lnTo>
+                  <a:lnTo>
+                    <a:pt x="6767953" y="639931"/>
+                  </a:lnTo>
+                  <a:lnTo>
+                    <a:pt x="6680057" y="632357"/>
+                  </a:lnTo>
+                  <a:lnTo>
+                    <a:pt x="6592162" y="624805"/>
+                  </a:lnTo>
+                  <a:lnTo>
+                    <a:pt x="6504266" y="617276"/>
+                  </a:lnTo>
+                  <a:lnTo>
+                    <a:pt x="6416371" y="609772"/>
+                  </a:lnTo>
+                  <a:lnTo>
+                    <a:pt x="6328475" y="602294"/>
+                  </a:lnTo>
+                  <a:lnTo>
+                    <a:pt x="6240580" y="594847"/>
+                  </a:lnTo>
+                  <a:lnTo>
+                    <a:pt x="6152684" y="587431"/>
+                  </a:lnTo>
+                  <a:lnTo>
+                    <a:pt x="6064789" y="580050"/>
+                  </a:lnTo>
+                  <a:lnTo>
+                    <a:pt x="5976893" y="572707"/>
+                  </a:lnTo>
+                  <a:lnTo>
+                    <a:pt x="5888998" y="565405"/>
+                  </a:lnTo>
+                  <a:lnTo>
+                    <a:pt x="5801102" y="558148"/>
+                  </a:lnTo>
+                  <a:lnTo>
+                    <a:pt x="5713207" y="550942"/>
+                  </a:lnTo>
+                  <a:lnTo>
+                    <a:pt x="5625311" y="543789"/>
+                  </a:lnTo>
+                  <a:lnTo>
+                    <a:pt x="5537416" y="536697"/>
+                  </a:lnTo>
+                  <a:lnTo>
+                    <a:pt x="5449520" y="529671"/>
+                  </a:lnTo>
+                  <a:lnTo>
+                    <a:pt x="5361625" y="522718"/>
+                  </a:lnTo>
+                  <a:lnTo>
+                    <a:pt x="5273729" y="515846"/>
+                  </a:lnTo>
+                  <a:lnTo>
+                    <a:pt x="5185834" y="509063"/>
+                  </a:lnTo>
+                  <a:lnTo>
+                    <a:pt x="5097938" y="502379"/>
+                  </a:lnTo>
+                  <a:lnTo>
+                    <a:pt x="5010043" y="495805"/>
+                  </a:lnTo>
+                  <a:lnTo>
+                    <a:pt x="4922147" y="489353"/>
+                  </a:lnTo>
+                  <a:lnTo>
+                    <a:pt x="4834252" y="483037"/>
+                  </a:lnTo>
+                  <a:lnTo>
+                    <a:pt x="4746356" y="476870"/>
+                  </a:lnTo>
+                  <a:lnTo>
+                    <a:pt x="4658461" y="470870"/>
+                  </a:lnTo>
+                  <a:lnTo>
+                    <a:pt x="4570565" y="465053"/>
+                  </a:lnTo>
+                  <a:lnTo>
+                    <a:pt x="4482670" y="459439"/>
+                  </a:lnTo>
+                  <a:lnTo>
+                    <a:pt x="4394774" y="454047"/>
+                  </a:lnTo>
+                  <a:lnTo>
+                    <a:pt x="4306879" y="448898"/>
+                  </a:lnTo>
+                  <a:lnTo>
+                    <a:pt x="4218983" y="444012"/>
+                  </a:lnTo>
+                  <a:lnTo>
+                    <a:pt x="4131088" y="439410"/>
+                  </a:lnTo>
+                  <a:lnTo>
+                    <a:pt x="4043192" y="435110"/>
+                  </a:lnTo>
+                  <a:lnTo>
+                    <a:pt x="3955297" y="431128"/>
+                  </a:lnTo>
+                  <a:lnTo>
+                    <a:pt x="3867401" y="427478"/>
+                  </a:lnTo>
+                  <a:lnTo>
+                    <a:pt x="3779506" y="424170"/>
+                  </a:lnTo>
+                  <a:lnTo>
+                    <a:pt x="3691610" y="421207"/>
+                  </a:lnTo>
+                  <a:lnTo>
+                    <a:pt x="3603715" y="418590"/>
+                  </a:lnTo>
+                  <a:lnTo>
+                    <a:pt x="3515819" y="416313"/>
+                  </a:lnTo>
+                  <a:lnTo>
+                    <a:pt x="3427924" y="414367"/>
+                  </a:lnTo>
+                  <a:lnTo>
+                    <a:pt x="3340028" y="412739"/>
+                  </a:lnTo>
+                  <a:lnTo>
+                    <a:pt x="3252133" y="411411"/>
+                  </a:lnTo>
+                  <a:lnTo>
+                    <a:pt x="3164237" y="410365"/>
+                  </a:lnTo>
+                  <a:lnTo>
+                    <a:pt x="3076342" y="409581"/>
+                  </a:lnTo>
+                  <a:lnTo>
+                    <a:pt x="2988446" y="409038"/>
+                  </a:lnTo>
+                  <a:lnTo>
+                    <a:pt x="2900551" y="408716"/>
+                  </a:lnTo>
+                  <a:lnTo>
+                    <a:pt x="2812655" y="408594"/>
+                  </a:lnTo>
+                  <a:lnTo>
+                    <a:pt x="2724760" y="408655"/>
+                  </a:lnTo>
+                  <a:lnTo>
+                    <a:pt x="2636864" y="408881"/>
+                  </a:lnTo>
+                  <a:lnTo>
+                    <a:pt x="2548969" y="409255"/>
+                  </a:lnTo>
+                  <a:lnTo>
+                    <a:pt x="2461073" y="409764"/>
+                  </a:lnTo>
+                  <a:lnTo>
+                    <a:pt x="2373178" y="410394"/>
+                  </a:lnTo>
+                  <a:lnTo>
+                    <a:pt x="2285282" y="411132"/>
+                  </a:lnTo>
+                  <a:lnTo>
+                    <a:pt x="2197387" y="411969"/>
+                  </a:lnTo>
+                  <a:lnTo>
+                    <a:pt x="2109491" y="412895"/>
+                  </a:lnTo>
+                  <a:lnTo>
+                    <a:pt x="2021596" y="413900"/>
+                  </a:lnTo>
+                  <a:lnTo>
+                    <a:pt x="1933700" y="414979"/>
+                  </a:lnTo>
+                  <a:lnTo>
+                    <a:pt x="1845805" y="416122"/>
+                  </a:lnTo>
+                  <a:lnTo>
+                    <a:pt x="1757909" y="417326"/>
+                  </a:lnTo>
+                  <a:lnTo>
+                    <a:pt x="1670014" y="418583"/>
+                  </a:lnTo>
+                  <a:lnTo>
+                    <a:pt x="1582118" y="419890"/>
+                  </a:lnTo>
+                  <a:lnTo>
+                    <a:pt x="1494223" y="421242"/>
+                  </a:lnTo>
+                  <a:lnTo>
+                    <a:pt x="1406327" y="422634"/>
+                  </a:lnTo>
+                  <a:lnTo>
+                    <a:pt x="1318432" y="424065"/>
+                  </a:lnTo>
+                  <a:lnTo>
+                    <a:pt x="1230536" y="425530"/>
+                  </a:lnTo>
+                  <a:lnTo>
+                    <a:pt x="1142641" y="427026"/>
+                  </a:lnTo>
+                  <a:lnTo>
+                    <a:pt x="1054745" y="428552"/>
+                  </a:lnTo>
+                  <a:lnTo>
+                    <a:pt x="966850" y="430105"/>
+                  </a:lnTo>
+                  <a:lnTo>
+                    <a:pt x="878954" y="431683"/>
+                  </a:lnTo>
+                  <a:lnTo>
+                    <a:pt x="791059" y="433283"/>
+                  </a:lnTo>
+                  <a:lnTo>
+                    <a:pt x="703163" y="434905"/>
+                  </a:lnTo>
+                  <a:lnTo>
+                    <a:pt x="615268" y="436547"/>
+                  </a:lnTo>
+                  <a:lnTo>
+                    <a:pt x="527372" y="438207"/>
+                  </a:lnTo>
+                  <a:lnTo>
+                    <a:pt x="439477" y="439884"/>
+                  </a:lnTo>
+                  <a:lnTo>
+                    <a:pt x="351581" y="441577"/>
+                  </a:lnTo>
+                  <a:lnTo>
+                    <a:pt x="263686" y="443285"/>
+                  </a:lnTo>
+                  <a:lnTo>
+                    <a:pt x="175790" y="445007"/>
+                  </a:lnTo>
+                  <a:lnTo>
+                    <a:pt x="87895" y="446742"/>
+                  </a:lnTo>
+                  <a:lnTo>
+                    <a:pt x="0" y="448489"/>
                   </a:lnTo>
                   <a:close/>
                 </a:path>
@@ -10200,258 +10165,258 @@
         </p:sp>
         <p:sp>
           <p:nvSpPr>
-            <p:cNvPr id="213" name="pl213"/>
-            <p:cNvSpPr/>
-            <p:nvPr/>
-          </p:nvSpPr>
-          <p:spPr>
-            <a:xfrm>
-              <a:off x="1326279" y="4146987"/>
-              <a:ext cx="6943744" cy="305064"/>
+            <p:cNvPr id="212" name="pl212"/>
+            <p:cNvSpPr/>
+            <p:nvPr/>
+          </p:nvSpPr>
+          <p:spPr>
+            <a:xfrm>
+              <a:off x="1326279" y="4158378"/>
+              <a:ext cx="6943744" cy="293154"/>
             </a:xfrm>
             <a:custGeom>
               <a:avLst/>
               <a:pathLst>
-                <a:path w="6943744" h="305064">
+                <a:path w="6943744" h="293154">
                   <a:moveTo>
                     <a:pt x="0" y="0"/>
                   </a:moveTo>
                   <a:lnTo>
-                    <a:pt x="87895" y="7922"/>
-                  </a:lnTo>
-                  <a:lnTo>
-                    <a:pt x="175790" y="15832"/>
-                  </a:lnTo>
-                  <a:lnTo>
-                    <a:pt x="263686" y="23729"/>
-                  </a:lnTo>
-                  <a:lnTo>
-                    <a:pt x="351581" y="31611"/>
-                  </a:lnTo>
-                  <a:lnTo>
-                    <a:pt x="439477" y="39479"/>
-                  </a:lnTo>
-                  <a:lnTo>
-                    <a:pt x="527372" y="47331"/>
-                  </a:lnTo>
-                  <a:lnTo>
-                    <a:pt x="615268" y="55166"/>
-                  </a:lnTo>
-                  <a:lnTo>
-                    <a:pt x="703163" y="62982"/>
-                  </a:lnTo>
-                  <a:lnTo>
-                    <a:pt x="791059" y="70778"/>
-                  </a:lnTo>
-                  <a:lnTo>
-                    <a:pt x="878954" y="78553"/>
-                  </a:lnTo>
-                  <a:lnTo>
-                    <a:pt x="966850" y="86305"/>
-                  </a:lnTo>
-                  <a:lnTo>
-                    <a:pt x="1054745" y="94031"/>
-                  </a:lnTo>
-                  <a:lnTo>
-                    <a:pt x="1142641" y="101731"/>
-                  </a:lnTo>
-                  <a:lnTo>
-                    <a:pt x="1230536" y="109401"/>
-                  </a:lnTo>
-                  <a:lnTo>
-                    <a:pt x="1318432" y="117039"/>
-                  </a:lnTo>
-                  <a:lnTo>
-                    <a:pt x="1406327" y="124642"/>
-                  </a:lnTo>
-                  <a:lnTo>
-                    <a:pt x="1494223" y="132208"/>
-                  </a:lnTo>
-                  <a:lnTo>
-                    <a:pt x="1582118" y="139732"/>
-                  </a:lnTo>
-                  <a:lnTo>
-                    <a:pt x="1670014" y="147210"/>
-                  </a:lnTo>
-                  <a:lnTo>
-                    <a:pt x="1757909" y="154639"/>
-                  </a:lnTo>
-                  <a:lnTo>
-                    <a:pt x="1845805" y="162014"/>
-                  </a:lnTo>
-                  <a:lnTo>
-                    <a:pt x="1933700" y="169328"/>
-                  </a:lnTo>
-                  <a:lnTo>
-                    <a:pt x="2021596" y="176576"/>
-                  </a:lnTo>
-                  <a:lnTo>
-                    <a:pt x="2109491" y="183751"/>
-                  </a:lnTo>
-                  <a:lnTo>
-                    <a:pt x="2197387" y="190845"/>
-                  </a:lnTo>
-                  <a:lnTo>
-                    <a:pt x="2285282" y="197850"/>
-                  </a:lnTo>
-                  <a:lnTo>
-                    <a:pt x="2373178" y="204756"/>
-                  </a:lnTo>
-                  <a:lnTo>
-                    <a:pt x="2461073" y="211553"/>
-                  </a:lnTo>
-                  <a:lnTo>
-                    <a:pt x="2548969" y="218227"/>
-                  </a:lnTo>
-                  <a:lnTo>
-                    <a:pt x="2636864" y="224766"/>
-                  </a:lnTo>
-                  <a:lnTo>
-                    <a:pt x="2724760" y="231156"/>
-                  </a:lnTo>
-                  <a:lnTo>
-                    <a:pt x="2812655" y="237380"/>
-                  </a:lnTo>
-                  <a:lnTo>
-                    <a:pt x="2900551" y="243420"/>
-                  </a:lnTo>
-                  <a:lnTo>
-                    <a:pt x="2988446" y="249259"/>
-                  </a:lnTo>
-                  <a:lnTo>
-                    <a:pt x="3076342" y="254876"/>
-                  </a:lnTo>
-                  <a:lnTo>
-                    <a:pt x="3164237" y="260252"/>
-                  </a:lnTo>
-                  <a:lnTo>
-                    <a:pt x="3252133" y="265365"/>
-                  </a:lnTo>
-                  <a:lnTo>
-                    <a:pt x="3340028" y="270197"/>
-                  </a:lnTo>
-                  <a:lnTo>
-                    <a:pt x="3427924" y="274729"/>
-                  </a:lnTo>
-                  <a:lnTo>
-                    <a:pt x="3515819" y="278945"/>
-                  </a:lnTo>
-                  <a:lnTo>
-                    <a:pt x="3603715" y="282831"/>
-                  </a:lnTo>
-                  <a:lnTo>
-                    <a:pt x="3691610" y="286380"/>
-                  </a:lnTo>
-                  <a:lnTo>
-                    <a:pt x="3779506" y="289586"/>
-                  </a:lnTo>
-                  <a:lnTo>
-                    <a:pt x="3867401" y="292449"/>
-                  </a:lnTo>
-                  <a:lnTo>
-                    <a:pt x="3955297" y="294975"/>
-                  </a:lnTo>
-                  <a:lnTo>
-                    <a:pt x="4043192" y="297174"/>
-                  </a:lnTo>
-                  <a:lnTo>
-                    <a:pt x="4131088" y="299059"/>
-                  </a:lnTo>
-                  <a:lnTo>
-                    <a:pt x="4218983" y="300647"/>
-                  </a:lnTo>
-                  <a:lnTo>
-                    <a:pt x="4306879" y="301955"/>
-                  </a:lnTo>
-                  <a:lnTo>
-                    <a:pt x="4394774" y="303005"/>
-                  </a:lnTo>
-                  <a:lnTo>
-                    <a:pt x="4482670" y="303816"/>
-                  </a:lnTo>
-                  <a:lnTo>
-                    <a:pt x="4570565" y="304408"/>
-                  </a:lnTo>
-                  <a:lnTo>
-                    <a:pt x="4658461" y="304802"/>
-                  </a:lnTo>
-                  <a:lnTo>
-                    <a:pt x="4746356" y="305015"/>
-                  </a:lnTo>
-                  <a:lnTo>
-                    <a:pt x="4834252" y="305064"/>
-                  </a:lnTo>
-                  <a:lnTo>
-                    <a:pt x="4922147" y="304966"/>
-                  </a:lnTo>
-                  <a:lnTo>
-                    <a:pt x="5010043" y="304735"/>
-                  </a:lnTo>
-                  <a:lnTo>
-                    <a:pt x="5097938" y="304384"/>
-                  </a:lnTo>
-                  <a:lnTo>
-                    <a:pt x="5185834" y="303925"/>
-                  </a:lnTo>
-                  <a:lnTo>
-                    <a:pt x="5273729" y="303369"/>
-                  </a:lnTo>
-                  <a:lnTo>
-                    <a:pt x="5361625" y="302724"/>
-                  </a:lnTo>
-                  <a:lnTo>
-                    <a:pt x="5449520" y="302000"/>
-                  </a:lnTo>
-                  <a:lnTo>
-                    <a:pt x="5537416" y="301203"/>
-                  </a:lnTo>
-                  <a:lnTo>
-                    <a:pt x="5625311" y="300342"/>
-                  </a:lnTo>
-                  <a:lnTo>
-                    <a:pt x="5713207" y="299421"/>
-                  </a:lnTo>
-                  <a:lnTo>
-                    <a:pt x="5801102" y="298447"/>
-                  </a:lnTo>
-                  <a:lnTo>
-                    <a:pt x="5888998" y="297423"/>
-                  </a:lnTo>
-                  <a:lnTo>
-                    <a:pt x="5976893" y="296355"/>
-                  </a:lnTo>
-                  <a:lnTo>
-                    <a:pt x="6064789" y="295246"/>
-                  </a:lnTo>
-                  <a:lnTo>
-                    <a:pt x="6152684" y="294099"/>
-                  </a:lnTo>
-                  <a:lnTo>
-                    <a:pt x="6240580" y="292918"/>
-                  </a:lnTo>
-                  <a:lnTo>
-                    <a:pt x="6328475" y="291706"/>
-                  </a:lnTo>
-                  <a:lnTo>
-                    <a:pt x="6416371" y="290464"/>
-                  </a:lnTo>
-                  <a:lnTo>
-                    <a:pt x="6504266" y="289196"/>
-                  </a:lnTo>
-                  <a:lnTo>
-                    <a:pt x="6592162" y="287903"/>
-                  </a:lnTo>
-                  <a:lnTo>
-                    <a:pt x="6680057" y="286587"/>
-                  </a:lnTo>
-                  <a:lnTo>
-                    <a:pt x="6767953" y="285250"/>
-                  </a:lnTo>
-                  <a:lnTo>
-                    <a:pt x="6855848" y="283893"/>
-                  </a:lnTo>
-                  <a:lnTo>
-                    <a:pt x="6943744" y="282518"/>
+                    <a:pt x="87895" y="7700"/>
+                  </a:lnTo>
+                  <a:lnTo>
+                    <a:pt x="175790" y="15388"/>
+                  </a:lnTo>
+                  <a:lnTo>
+                    <a:pt x="263686" y="23064"/>
+                  </a:lnTo>
+                  <a:lnTo>
+                    <a:pt x="351581" y="30725"/>
+                  </a:lnTo>
+                  <a:lnTo>
+                    <a:pt x="439477" y="38372"/>
+                  </a:lnTo>
+                  <a:lnTo>
+                    <a:pt x="527372" y="46002"/>
+                  </a:lnTo>
+                  <a:lnTo>
+                    <a:pt x="615268" y="53616"/>
+                  </a:lnTo>
+                  <a:lnTo>
+                    <a:pt x="703163" y="61211"/>
+                  </a:lnTo>
+                  <a:lnTo>
+                    <a:pt x="791059" y="68787"/>
+                  </a:lnTo>
+                  <a:lnTo>
+                    <a:pt x="878954" y="76341"/>
+                  </a:lnTo>
+                  <a:lnTo>
+                    <a:pt x="966850" y="83872"/>
+                  </a:lnTo>
+                  <a:lnTo>
+                    <a:pt x="1054745" y="91378"/>
+                  </a:lnTo>
+                  <a:lnTo>
+                    <a:pt x="1142641" y="98857"/>
+                  </a:lnTo>
+                  <a:lnTo>
+                    <a:pt x="1230536" y="106308"/>
+                  </a:lnTo>
+                  <a:lnTo>
+                    <a:pt x="1318432" y="113726"/>
+                  </a:lnTo>
+                  <a:lnTo>
+                    <a:pt x="1406327" y="121110"/>
+                  </a:lnTo>
+                  <a:lnTo>
+                    <a:pt x="1494223" y="128456"/>
+                  </a:lnTo>
+                  <a:lnTo>
+                    <a:pt x="1582118" y="135762"/>
+                  </a:lnTo>
+                  <a:lnTo>
+                    <a:pt x="1670014" y="143022"/>
+                  </a:lnTo>
+                  <a:lnTo>
+                    <a:pt x="1757909" y="150233"/>
+                  </a:lnTo>
+                  <a:lnTo>
+                    <a:pt x="1845805" y="157390"/>
+                  </a:lnTo>
+                  <a:lnTo>
+                    <a:pt x="1933700" y="164487"/>
+                  </a:lnTo>
+                  <a:lnTo>
+                    <a:pt x="2021596" y="171518"/>
+                  </a:lnTo>
+                  <a:lnTo>
+                    <a:pt x="2109491" y="178478"/>
+                  </a:lnTo>
+                  <a:lnTo>
+                    <a:pt x="2197387" y="185357"/>
+                  </a:lnTo>
+                  <a:lnTo>
+                    <a:pt x="2285282" y="192147"/>
+                  </a:lnTo>
+                  <a:lnTo>
+                    <a:pt x="2373178" y="198839"/>
+                  </a:lnTo>
+                  <a:lnTo>
+                    <a:pt x="2461073" y="205422"/>
+                  </a:lnTo>
+                  <a:lnTo>
+                    <a:pt x="2548969" y="211885"/>
+                  </a:lnTo>
+                  <a:lnTo>
+                    <a:pt x="2636864" y="218213"/>
+                  </a:lnTo>
+                  <a:lnTo>
+                    <a:pt x="2724760" y="224392"/>
+                  </a:lnTo>
+                  <a:lnTo>
+                    <a:pt x="2812655" y="230406"/>
+                  </a:lnTo>
+                  <a:lnTo>
+                    <a:pt x="2900551" y="236238"/>
+                  </a:lnTo>
+                  <a:lnTo>
+                    <a:pt x="2988446" y="241869"/>
+                  </a:lnTo>
+                  <a:lnTo>
+                    <a:pt x="3076342" y="247280"/>
+                  </a:lnTo>
+                  <a:lnTo>
+                    <a:pt x="3164237" y="252449"/>
+                  </a:lnTo>
+                  <a:lnTo>
+                    <a:pt x="3252133" y="257357"/>
+                  </a:lnTo>
+                  <a:lnTo>
+                    <a:pt x="3340028" y="261982"/>
+                  </a:lnTo>
+                  <a:lnTo>
+                    <a:pt x="3427924" y="266308"/>
+                  </a:lnTo>
+                  <a:lnTo>
+                    <a:pt x="3515819" y="270315"/>
+                  </a:lnTo>
+                  <a:lnTo>
+                    <a:pt x="3603715" y="273992"/>
+                  </a:lnTo>
+                  <a:lnTo>
+                    <a:pt x="3691610" y="277329"/>
+                  </a:lnTo>
+                  <a:lnTo>
+                    <a:pt x="3779506" y="280319"/>
+                  </a:lnTo>
+                  <a:lnTo>
+                    <a:pt x="3867401" y="282964"/>
+                  </a:lnTo>
+                  <a:lnTo>
+                    <a:pt x="3955297" y="285268"/>
+                  </a:lnTo>
+                  <a:lnTo>
+                    <a:pt x="4043192" y="287240"/>
+                  </a:lnTo>
+                  <a:lnTo>
+                    <a:pt x="4131088" y="288893"/>
+                  </a:lnTo>
+                  <a:lnTo>
+                    <a:pt x="4218983" y="290244"/>
+                  </a:lnTo>
+                  <a:lnTo>
+                    <a:pt x="4306879" y="291312"/>
+                  </a:lnTo>
+                  <a:lnTo>
+                    <a:pt x="4394774" y="292116"/>
+                  </a:lnTo>
+                  <a:lnTo>
+                    <a:pt x="4482670" y="292678"/>
+                  </a:lnTo>
+                  <a:lnTo>
+                    <a:pt x="4570565" y="293017"/>
+                  </a:lnTo>
+                  <a:lnTo>
+                    <a:pt x="4658461" y="293154"/>
+                  </a:lnTo>
+                  <a:lnTo>
+                    <a:pt x="4746356" y="293107"/>
+                  </a:lnTo>
+                  <a:lnTo>
+                    <a:pt x="4834252" y="292894"/>
+                  </a:lnTo>
+                  <a:lnTo>
+                    <a:pt x="4922147" y="292531"/>
+                  </a:lnTo>
+                  <a:lnTo>
+                    <a:pt x="5010043" y="292033"/>
+                  </a:lnTo>
+                  <a:lnTo>
+                    <a:pt x="5097938" y="291412"/>
+                  </a:lnTo>
+                  <a:lnTo>
+                    <a:pt x="5185834" y="290682"/>
+                  </a:lnTo>
+                  <a:lnTo>
+                    <a:pt x="5273729" y="289852"/>
+                  </a:lnTo>
+                  <a:lnTo>
+                    <a:pt x="5361625" y="288934"/>
+                  </a:lnTo>
+                  <a:lnTo>
+                    <a:pt x="5449520" y="287934"/>
+                  </a:lnTo>
+                  <a:lnTo>
+                    <a:pt x="5537416" y="286862"/>
+                  </a:lnTo>
+                  <a:lnTo>
+                    <a:pt x="5625311" y="285723"/>
+                  </a:lnTo>
+                  <a:lnTo>
+                    <a:pt x="5713207" y="284524"/>
+                  </a:lnTo>
+                  <a:lnTo>
+                    <a:pt x="5801102" y="283271"/>
+                  </a:lnTo>
+                  <a:lnTo>
+                    <a:pt x="5888998" y="281968"/>
+                  </a:lnTo>
+                  <a:lnTo>
+                    <a:pt x="5976893" y="280620"/>
+                  </a:lnTo>
+                  <a:lnTo>
+                    <a:pt x="6064789" y="279230"/>
+                  </a:lnTo>
+                  <a:lnTo>
+                    <a:pt x="6152684" y="277802"/>
+                  </a:lnTo>
+                  <a:lnTo>
+                    <a:pt x="6240580" y="276340"/>
+                  </a:lnTo>
+                  <a:lnTo>
+                    <a:pt x="6328475" y="274846"/>
+                  </a:lnTo>
+                  <a:lnTo>
+                    <a:pt x="6416371" y="273322"/>
+                  </a:lnTo>
+                  <a:lnTo>
+                    <a:pt x="6504266" y="271772"/>
+                  </a:lnTo>
+                  <a:lnTo>
+                    <a:pt x="6592162" y="270196"/>
+                  </a:lnTo>
+                  <a:lnTo>
+                    <a:pt x="6680057" y="268597"/>
+                  </a:lnTo>
+                  <a:lnTo>
+                    <a:pt x="6767953" y="266977"/>
+                  </a:lnTo>
+                  <a:lnTo>
+                    <a:pt x="6855848" y="265337"/>
+                  </a:lnTo>
+                  <a:lnTo>
+                    <a:pt x="6943744" y="263678"/>
                   </a:lnTo>
                 </a:path>
               </a:pathLst>
@@ -10465,258 +10430,258 @@
         </p:sp>
         <p:sp>
           <p:nvSpPr>
-            <p:cNvPr id="214" name="pl214"/>
-            <p:cNvSpPr/>
-            <p:nvPr/>
-          </p:nvSpPr>
-          <p:spPr>
-            <a:xfrm>
-              <a:off x="1326279" y="4560839"/>
-              <a:ext cx="6943744" cy="258889"/>
+            <p:cNvPr id="213" name="pl213"/>
+            <p:cNvSpPr/>
+            <p:nvPr/>
+          </p:nvSpPr>
+          <p:spPr>
+            <a:xfrm>
+              <a:off x="1326279" y="4566972"/>
+              <a:ext cx="6943744" cy="246542"/>
             </a:xfrm>
             <a:custGeom>
               <a:avLst/>
               <a:pathLst>
-                <a:path w="6943744" h="258889">
+                <a:path w="6943744" h="246542">
                   <a:moveTo>
-                    <a:pt x="6943744" y="258889"/>
+                    <a:pt x="6943744" y="246542"/>
                   </a:moveTo>
                   <a:lnTo>
-                    <a:pt x="6855848" y="251052"/>
-                  </a:lnTo>
-                  <a:lnTo>
-                    <a:pt x="6767953" y="243233"/>
-                  </a:lnTo>
-                  <a:lnTo>
-                    <a:pt x="6680057" y="235434"/>
-                  </a:lnTo>
-                  <a:lnTo>
-                    <a:pt x="6592162" y="227655"/>
-                  </a:lnTo>
-                  <a:lnTo>
-                    <a:pt x="6504266" y="219900"/>
-                  </a:lnTo>
-                  <a:lnTo>
-                    <a:pt x="6416371" y="212170"/>
-                  </a:lnTo>
-                  <a:lnTo>
-                    <a:pt x="6328475" y="204466"/>
-                  </a:lnTo>
-                  <a:lnTo>
-                    <a:pt x="6240580" y="196792"/>
-                  </a:lnTo>
-                  <a:lnTo>
-                    <a:pt x="6152684" y="189149"/>
-                  </a:lnTo>
-                  <a:lnTo>
-                    <a:pt x="6064789" y="181540"/>
-                  </a:lnTo>
-                  <a:lnTo>
-                    <a:pt x="5976893" y="173969"/>
-                  </a:lnTo>
-                  <a:lnTo>
-                    <a:pt x="5888998" y="166439"/>
-                  </a:lnTo>
-                  <a:lnTo>
-                    <a:pt x="5801102" y="158953"/>
-                  </a:lnTo>
-                  <a:lnTo>
-                    <a:pt x="5713207" y="151517"/>
-                  </a:lnTo>
-                  <a:lnTo>
-                    <a:pt x="5625311" y="144134"/>
-                  </a:lnTo>
-                  <a:lnTo>
-                    <a:pt x="5537416" y="136810"/>
-                  </a:lnTo>
-                  <a:lnTo>
-                    <a:pt x="5449520" y="129552"/>
-                  </a:lnTo>
-                  <a:lnTo>
-                    <a:pt x="5361625" y="122366"/>
-                  </a:lnTo>
-                  <a:lnTo>
-                    <a:pt x="5273729" y="115259"/>
-                  </a:lnTo>
-                  <a:lnTo>
-                    <a:pt x="5185834" y="108240"/>
-                  </a:lnTo>
-                  <a:lnTo>
-                    <a:pt x="5097938" y="101319"/>
-                  </a:lnTo>
-                  <a:lnTo>
-                    <a:pt x="5010043" y="94506"/>
-                  </a:lnTo>
-                  <a:lnTo>
-                    <a:pt x="4922147" y="87813"/>
-                  </a:lnTo>
-                  <a:lnTo>
-                    <a:pt x="4834252" y="81253"/>
-                  </a:lnTo>
-                  <a:lnTo>
-                    <a:pt x="4746356" y="74840"/>
-                  </a:lnTo>
-                  <a:lnTo>
-                    <a:pt x="4658461" y="68591"/>
-                  </a:lnTo>
-                  <a:lnTo>
-                    <a:pt x="4570565" y="62523"/>
-                  </a:lnTo>
-                  <a:lnTo>
-                    <a:pt x="4482670" y="56653"/>
-                  </a:lnTo>
-                  <a:lnTo>
-                    <a:pt x="4394774" y="51002"/>
-                  </a:lnTo>
-                  <a:lnTo>
-                    <a:pt x="4306879" y="45590"/>
-                  </a:lnTo>
-                  <a:lnTo>
-                    <a:pt x="4218983" y="40436"/>
-                  </a:lnTo>
-                  <a:lnTo>
-                    <a:pt x="4131088" y="35561"/>
-                  </a:lnTo>
-                  <a:lnTo>
-                    <a:pt x="4043192" y="30984"/>
-                  </a:lnTo>
-                  <a:lnTo>
-                    <a:pt x="3955297" y="26721"/>
-                  </a:lnTo>
-                  <a:lnTo>
-                    <a:pt x="3867401" y="22786"/>
-                  </a:lnTo>
-                  <a:lnTo>
-                    <a:pt x="3779506" y="19187"/>
-                  </a:lnTo>
-                  <a:lnTo>
-                    <a:pt x="3691610" y="15931"/>
-                  </a:lnTo>
-                  <a:lnTo>
-                    <a:pt x="3603715" y="13017"/>
-                  </a:lnTo>
-                  <a:lnTo>
-                    <a:pt x="3515819" y="10442"/>
-                  </a:lnTo>
-                  <a:lnTo>
-                    <a:pt x="3427924" y="8195"/>
-                  </a:lnTo>
-                  <a:lnTo>
-                    <a:pt x="3340028" y="6265"/>
-                  </a:lnTo>
-                  <a:lnTo>
-                    <a:pt x="3252133" y="4635"/>
-                  </a:lnTo>
-                  <a:lnTo>
-                    <a:pt x="3164237" y="3287"/>
-                  </a:lnTo>
-                  <a:lnTo>
-                    <a:pt x="3076342" y="2200"/>
-                  </a:lnTo>
-                  <a:lnTo>
-                    <a:pt x="2988446" y="1355"/>
-                  </a:lnTo>
-                  <a:lnTo>
-                    <a:pt x="2900551" y="732"/>
-                  </a:lnTo>
-                  <a:lnTo>
-                    <a:pt x="2812655" y="310"/>
-                  </a:lnTo>
-                  <a:lnTo>
-                    <a:pt x="2724760" y="72"/>
-                  </a:lnTo>
-                  <a:lnTo>
-                    <a:pt x="2636864" y="0"/>
-                  </a:lnTo>
-                  <a:lnTo>
-                    <a:pt x="2548969" y="77"/>
-                  </a:lnTo>
-                  <a:lnTo>
-                    <a:pt x="2461073" y="289"/>
-                  </a:lnTo>
-                  <a:lnTo>
-                    <a:pt x="2373178" y="623"/>
-                  </a:lnTo>
-                  <a:lnTo>
-                    <a:pt x="2285282" y="1067"/>
-                  </a:lnTo>
-                  <a:lnTo>
-                    <a:pt x="2197387" y="1610"/>
-                  </a:lnTo>
-                  <a:lnTo>
-                    <a:pt x="2109491" y="2242"/>
-                  </a:lnTo>
-                  <a:lnTo>
-                    <a:pt x="2021596" y="2955"/>
-                  </a:lnTo>
-                  <a:lnTo>
-                    <a:pt x="1933700" y="3741"/>
-                  </a:lnTo>
-                  <a:lnTo>
-                    <a:pt x="1845805" y="4594"/>
-                  </a:lnTo>
-                  <a:lnTo>
-                    <a:pt x="1757909" y="5506"/>
-                  </a:lnTo>
-                  <a:lnTo>
-                    <a:pt x="1670014" y="6473"/>
-                  </a:lnTo>
-                  <a:lnTo>
-                    <a:pt x="1582118" y="7489"/>
-                  </a:lnTo>
-                  <a:lnTo>
-                    <a:pt x="1494223" y="8551"/>
-                  </a:lnTo>
-                  <a:lnTo>
-                    <a:pt x="1406327" y="9655"/>
-                  </a:lnTo>
-                  <a:lnTo>
-                    <a:pt x="1318432" y="10796"/>
-                  </a:lnTo>
-                  <a:lnTo>
-                    <a:pt x="1230536" y="11972"/>
-                  </a:lnTo>
-                  <a:lnTo>
-                    <a:pt x="1142641" y="13180"/>
-                  </a:lnTo>
-                  <a:lnTo>
-                    <a:pt x="1054745" y="14417"/>
-                  </a:lnTo>
-                  <a:lnTo>
-                    <a:pt x="966850" y="15682"/>
-                  </a:lnTo>
-                  <a:lnTo>
-                    <a:pt x="878954" y="16972"/>
-                  </a:lnTo>
-                  <a:lnTo>
-                    <a:pt x="791059" y="18284"/>
-                  </a:lnTo>
-                  <a:lnTo>
-                    <a:pt x="703163" y="19618"/>
-                  </a:lnTo>
-                  <a:lnTo>
-                    <a:pt x="615268" y="20973"/>
-                  </a:lnTo>
-                  <a:lnTo>
-                    <a:pt x="527372" y="22345"/>
-                  </a:lnTo>
-                  <a:lnTo>
-                    <a:pt x="439477" y="23735"/>
-                  </a:lnTo>
-                  <a:lnTo>
-                    <a:pt x="351581" y="25141"/>
-                  </a:lnTo>
-                  <a:lnTo>
-                    <a:pt x="263686" y="26562"/>
-                  </a:lnTo>
-                  <a:lnTo>
-                    <a:pt x="175790" y="27996"/>
-                  </a:lnTo>
-                  <a:lnTo>
-                    <a:pt x="87895" y="29444"/>
-                  </a:lnTo>
-                  <a:lnTo>
-                    <a:pt x="0" y="30905"/>
+                    <a:pt x="6855848" y="238930"/>
+                  </a:lnTo>
+                  <a:lnTo>
+                    <a:pt x="6767953" y="231336"/>
+                  </a:lnTo>
+                  <a:lnTo>
+                    <a:pt x="6680057" y="223763"/>
+                  </a:lnTo>
+                  <a:lnTo>
+                    <a:pt x="6592162" y="216210"/>
+                  </a:lnTo>
+                  <a:lnTo>
+                    <a:pt x="6504266" y="208681"/>
+                  </a:lnTo>
+                  <a:lnTo>
+                    <a:pt x="6416371" y="201177"/>
+                  </a:lnTo>
+                  <a:lnTo>
+                    <a:pt x="6328475" y="193700"/>
+                  </a:lnTo>
+                  <a:lnTo>
+                    <a:pt x="6240580" y="186252"/>
+                  </a:lnTo>
+                  <a:lnTo>
+                    <a:pt x="6152684" y="178836"/>
+                  </a:lnTo>
+                  <a:lnTo>
+                    <a:pt x="6064789" y="171455"/>
+                  </a:lnTo>
+                  <a:lnTo>
+                    <a:pt x="5976893" y="164112"/>
+                  </a:lnTo>
+                  <a:lnTo>
+                    <a:pt x="5888998" y="156810"/>
+                  </a:lnTo>
+                  <a:lnTo>
+                    <a:pt x="5801102" y="149554"/>
+                  </a:lnTo>
+                  <a:lnTo>
+                    <a:pt x="5713207" y="142347"/>
+                  </a:lnTo>
+                  <a:lnTo>
+                    <a:pt x="5625311" y="135195"/>
+                  </a:lnTo>
+                  <a:lnTo>
+                    <a:pt x="5537416" y="128103"/>
+                  </a:lnTo>
+                  <a:lnTo>
+                    <a:pt x="5449520" y="121077"/>
+                  </a:lnTo>
+                  <a:lnTo>
+                    <a:pt x="5361625" y="114124"/>
+                  </a:lnTo>
+                  <a:lnTo>
+                    <a:pt x="5273729" y="107251"/>
+                  </a:lnTo>
+                  <a:lnTo>
+                    <a:pt x="5185834" y="100468"/>
+                  </a:lnTo>
+                  <a:lnTo>
+                    <a:pt x="5097938" y="93785"/>
+                  </a:lnTo>
+                  <a:lnTo>
+                    <a:pt x="5010043" y="87211"/>
+                  </a:lnTo>
+                  <a:lnTo>
+                    <a:pt x="4922147" y="80759"/>
+                  </a:lnTo>
+                  <a:lnTo>
+                    <a:pt x="4834252" y="74442"/>
+                  </a:lnTo>
+                  <a:lnTo>
+                    <a:pt x="4746356" y="68275"/>
+                  </a:lnTo>
+                  <a:lnTo>
+                    <a:pt x="4658461" y="62275"/>
+                  </a:lnTo>
+                  <a:lnTo>
+                    <a:pt x="4570565" y="56458"/>
+                  </a:lnTo>
+                  <a:lnTo>
+                    <a:pt x="4482670" y="50844"/>
+                  </a:lnTo>
+                  <a:lnTo>
+                    <a:pt x="4394774" y="45452"/>
+                  </a:lnTo>
+                  <a:lnTo>
+                    <a:pt x="4306879" y="40303"/>
+                  </a:lnTo>
+                  <a:lnTo>
+                    <a:pt x="4218983" y="35418"/>
+                  </a:lnTo>
+                  <a:lnTo>
+                    <a:pt x="4131088" y="30815"/>
+                  </a:lnTo>
+                  <a:lnTo>
+                    <a:pt x="4043192" y="26515"/>
+                  </a:lnTo>
+                  <a:lnTo>
+                    <a:pt x="3955297" y="22534"/>
+                  </a:lnTo>
+                  <a:lnTo>
+                    <a:pt x="3867401" y="18884"/>
+                  </a:lnTo>
+                  <a:lnTo>
+                    <a:pt x="3779506" y="15575"/>
+                  </a:lnTo>
+                  <a:lnTo>
+                    <a:pt x="3691610" y="12612"/>
+                  </a:lnTo>
+                  <a:lnTo>
+                    <a:pt x="3603715" y="9995"/>
+                  </a:lnTo>
+                  <a:lnTo>
+                    <a:pt x="3515819" y="7718"/>
+                  </a:lnTo>
+                  <a:lnTo>
+                    <a:pt x="3427924" y="5773"/>
+                  </a:lnTo>
+                  <a:lnTo>
+                    <a:pt x="3340028" y="4144"/>
+                  </a:lnTo>
+                  <a:lnTo>
+                    <a:pt x="3252133" y="2817"/>
+                  </a:lnTo>
+                  <a:lnTo>
+                    <a:pt x="3164237" y="1771"/>
+                  </a:lnTo>
+                  <a:lnTo>
+                    <a:pt x="3076342" y="986"/>
+                  </a:lnTo>
+                  <a:lnTo>
+                    <a:pt x="2988446" y="443"/>
+                  </a:lnTo>
+                  <a:lnTo>
+                    <a:pt x="2900551" y="121"/>
+                  </a:lnTo>
+                  <a:lnTo>
+                    <a:pt x="2812655" y="0"/>
+                  </a:lnTo>
+                  <a:lnTo>
+                    <a:pt x="2724760" y="60"/>
+                  </a:lnTo>
+                  <a:lnTo>
+                    <a:pt x="2636864" y="286"/>
+                  </a:lnTo>
+                  <a:lnTo>
+                    <a:pt x="2548969" y="661"/>
+                  </a:lnTo>
+                  <a:lnTo>
+                    <a:pt x="2461073" y="1169"/>
+                  </a:lnTo>
+                  <a:lnTo>
+                    <a:pt x="2373178" y="1799"/>
+                  </a:lnTo>
+                  <a:lnTo>
+                    <a:pt x="2285282" y="2538"/>
+                  </a:lnTo>
+                  <a:lnTo>
+                    <a:pt x="2197387" y="3375"/>
+                  </a:lnTo>
+                  <a:lnTo>
+                    <a:pt x="2109491" y="4300"/>
+                  </a:lnTo>
+                  <a:lnTo>
+                    <a:pt x="2021596" y="5306"/>
+                  </a:lnTo>
+                  <a:lnTo>
+                    <a:pt x="1933700" y="6384"/>
+                  </a:lnTo>
+                  <a:lnTo>
+                    <a:pt x="1845805" y="7528"/>
+                  </a:lnTo>
+                  <a:lnTo>
+                    <a:pt x="1757909" y="8731"/>
+                  </a:lnTo>
+                  <a:lnTo>
+                    <a:pt x="1670014" y="9988"/>
+                  </a:lnTo>
+                  <a:lnTo>
+                    <a:pt x="1582118" y="11295"/>
+                  </a:lnTo>
+                  <a:lnTo>
+                    <a:pt x="1494223" y="12647"/>
+                  </a:lnTo>
+                  <a:lnTo>
+                    <a:pt x="1406327" y="14040"/>
+                  </a:lnTo>
+                  <a:lnTo>
+                    <a:pt x="1318432" y="15470"/>
+                  </a:lnTo>
+                  <a:lnTo>
+                    <a:pt x="1230536" y="16935"/>
+                  </a:lnTo>
+                  <a:lnTo>
+                    <a:pt x="1142641" y="18432"/>
+                  </a:lnTo>
+                  <a:lnTo>
+                    <a:pt x="1054745" y="19958"/>
+                  </a:lnTo>
+                  <a:lnTo>
+                    <a:pt x="966850" y="21511"/>
+                  </a:lnTo>
+                  <a:lnTo>
+                    <a:pt x="878954" y="23088"/>
+                  </a:lnTo>
+                  <a:lnTo>
+                    <a:pt x="791059" y="24689"/>
+                  </a:lnTo>
+                  <a:lnTo>
+                    <a:pt x="703163" y="26311"/>
+                  </a:lnTo>
+                  <a:lnTo>
+                    <a:pt x="615268" y="27952"/>
+                  </a:lnTo>
+                  <a:lnTo>
+                    <a:pt x="527372" y="29612"/>
+                  </a:lnTo>
+                  <a:lnTo>
+                    <a:pt x="439477" y="31290"/>
+                  </a:lnTo>
+                  <a:lnTo>
+                    <a:pt x="351581" y="32983"/>
+                  </a:lnTo>
+                  <a:lnTo>
+                    <a:pt x="263686" y="34691"/>
+                  </a:lnTo>
+                  <a:lnTo>
+                    <a:pt x="175790" y="36412"/>
+                  </a:lnTo>
+                  <a:lnTo>
+                    <a:pt x="87895" y="38147"/>
+                  </a:lnTo>
+                  <a:lnTo>
+                    <a:pt x="0" y="39894"/>
                   </a:lnTo>
                 </a:path>
               </a:pathLst>
@@ -10730,258 +10695,258 @@
         </p:sp>
         <p:sp>
           <p:nvSpPr>
-            <p:cNvPr id="215" name="pl215"/>
-            <p:cNvSpPr/>
-            <p:nvPr/>
-          </p:nvSpPr>
-          <p:spPr>
-            <a:xfrm>
-              <a:off x="1326279" y="4369366"/>
-              <a:ext cx="6943744" cy="255251"/>
+            <p:cNvPr id="214" name="pl214"/>
+            <p:cNvSpPr/>
+            <p:nvPr/>
+          </p:nvSpPr>
+          <p:spPr>
+            <a:xfrm>
+              <a:off x="1326279" y="4382622"/>
+              <a:ext cx="6943744" cy="235163"/>
             </a:xfrm>
             <a:custGeom>
               <a:avLst/>
               <a:pathLst>
-                <a:path w="6943744" h="255251">
+                <a:path w="6943744" h="235163">
                   <a:moveTo>
                     <a:pt x="0" y="0"/>
                   </a:moveTo>
                   <a:lnTo>
-                    <a:pt x="87895" y="3231"/>
-                  </a:lnTo>
-                  <a:lnTo>
-                    <a:pt x="175790" y="6462"/>
-                  </a:lnTo>
-                  <a:lnTo>
-                    <a:pt x="263686" y="9693"/>
-                  </a:lnTo>
-                  <a:lnTo>
-                    <a:pt x="351581" y="12924"/>
-                  </a:lnTo>
-                  <a:lnTo>
-                    <a:pt x="439477" y="16155"/>
-                  </a:lnTo>
-                  <a:lnTo>
-                    <a:pt x="527372" y="19386"/>
-                  </a:lnTo>
-                  <a:lnTo>
-                    <a:pt x="615268" y="22617"/>
-                  </a:lnTo>
-                  <a:lnTo>
-                    <a:pt x="703163" y="25848"/>
-                  </a:lnTo>
-                  <a:lnTo>
-                    <a:pt x="791059" y="29079"/>
-                  </a:lnTo>
-                  <a:lnTo>
-                    <a:pt x="878954" y="32310"/>
-                  </a:lnTo>
-                  <a:lnTo>
-                    <a:pt x="966850" y="35541"/>
-                  </a:lnTo>
-                  <a:lnTo>
-                    <a:pt x="1054745" y="38772"/>
-                  </a:lnTo>
-                  <a:lnTo>
-                    <a:pt x="1142641" y="42003"/>
-                  </a:lnTo>
-                  <a:lnTo>
-                    <a:pt x="1230536" y="45234"/>
-                  </a:lnTo>
-                  <a:lnTo>
-                    <a:pt x="1318432" y="48465"/>
-                  </a:lnTo>
-                  <a:lnTo>
-                    <a:pt x="1406327" y="51696"/>
-                  </a:lnTo>
-                  <a:lnTo>
-                    <a:pt x="1494223" y="54927"/>
-                  </a:lnTo>
-                  <a:lnTo>
-                    <a:pt x="1582118" y="58158"/>
-                  </a:lnTo>
-                  <a:lnTo>
-                    <a:pt x="1670014" y="61389"/>
-                  </a:lnTo>
-                  <a:lnTo>
-                    <a:pt x="1757909" y="64620"/>
-                  </a:lnTo>
-                  <a:lnTo>
-                    <a:pt x="1845805" y="67851"/>
-                  </a:lnTo>
-                  <a:lnTo>
-                    <a:pt x="1933700" y="71082"/>
-                  </a:lnTo>
-                  <a:lnTo>
-                    <a:pt x="2021596" y="74313"/>
-                  </a:lnTo>
-                  <a:lnTo>
-                    <a:pt x="2109491" y="77544"/>
-                  </a:lnTo>
-                  <a:lnTo>
-                    <a:pt x="2197387" y="80775"/>
-                  </a:lnTo>
-                  <a:lnTo>
-                    <a:pt x="2285282" y="84006"/>
-                  </a:lnTo>
-                  <a:lnTo>
-                    <a:pt x="2373178" y="87237"/>
-                  </a:lnTo>
-                  <a:lnTo>
-                    <a:pt x="2461073" y="90468"/>
-                  </a:lnTo>
-                  <a:lnTo>
-                    <a:pt x="2548969" y="93699"/>
-                  </a:lnTo>
-                  <a:lnTo>
-                    <a:pt x="2636864" y="96930"/>
-                  </a:lnTo>
-                  <a:lnTo>
-                    <a:pt x="2724760" y="100161"/>
-                  </a:lnTo>
-                  <a:lnTo>
-                    <a:pt x="2812655" y="103392"/>
-                  </a:lnTo>
-                  <a:lnTo>
-                    <a:pt x="2900551" y="106623"/>
-                  </a:lnTo>
-                  <a:lnTo>
-                    <a:pt x="2988446" y="109854"/>
-                  </a:lnTo>
-                  <a:lnTo>
-                    <a:pt x="3076342" y="113086"/>
-                  </a:lnTo>
-                  <a:lnTo>
-                    <a:pt x="3164237" y="116317"/>
-                  </a:lnTo>
-                  <a:lnTo>
-                    <a:pt x="3252133" y="119548"/>
-                  </a:lnTo>
-                  <a:lnTo>
-                    <a:pt x="3340028" y="122779"/>
-                  </a:lnTo>
-                  <a:lnTo>
-                    <a:pt x="3427924" y="126010"/>
-                  </a:lnTo>
-                  <a:lnTo>
-                    <a:pt x="3515819" y="129241"/>
-                  </a:lnTo>
-                  <a:lnTo>
-                    <a:pt x="3603715" y="132472"/>
-                  </a:lnTo>
-                  <a:lnTo>
-                    <a:pt x="3691610" y="135703"/>
-                  </a:lnTo>
-                  <a:lnTo>
-                    <a:pt x="3779506" y="138934"/>
-                  </a:lnTo>
-                  <a:lnTo>
-                    <a:pt x="3867401" y="142165"/>
-                  </a:lnTo>
-                  <a:lnTo>
-                    <a:pt x="3955297" y="145396"/>
-                  </a:lnTo>
-                  <a:lnTo>
-                    <a:pt x="4043192" y="148627"/>
-                  </a:lnTo>
-                  <a:lnTo>
-                    <a:pt x="4131088" y="151858"/>
-                  </a:lnTo>
-                  <a:lnTo>
-                    <a:pt x="4218983" y="155089"/>
-                  </a:lnTo>
-                  <a:lnTo>
-                    <a:pt x="4306879" y="158320"/>
-                  </a:lnTo>
-                  <a:lnTo>
-                    <a:pt x="4394774" y="161551"/>
-                  </a:lnTo>
-                  <a:lnTo>
-                    <a:pt x="4482670" y="164782"/>
-                  </a:lnTo>
-                  <a:lnTo>
-                    <a:pt x="4570565" y="168013"/>
-                  </a:lnTo>
-                  <a:lnTo>
-                    <a:pt x="4658461" y="171244"/>
-                  </a:lnTo>
-                  <a:lnTo>
-                    <a:pt x="4746356" y="174475"/>
-                  </a:lnTo>
-                  <a:lnTo>
-                    <a:pt x="4834252" y="177706"/>
-                  </a:lnTo>
-                  <a:lnTo>
-                    <a:pt x="4922147" y="180937"/>
-                  </a:lnTo>
-                  <a:lnTo>
-                    <a:pt x="5010043" y="184168"/>
-                  </a:lnTo>
-                  <a:lnTo>
-                    <a:pt x="5097938" y="187399"/>
-                  </a:lnTo>
-                  <a:lnTo>
-                    <a:pt x="5185834" y="190630"/>
-                  </a:lnTo>
-                  <a:lnTo>
-                    <a:pt x="5273729" y="193861"/>
-                  </a:lnTo>
-                  <a:lnTo>
-                    <a:pt x="5361625" y="197092"/>
-                  </a:lnTo>
-                  <a:lnTo>
-                    <a:pt x="5449520" y="200323"/>
-                  </a:lnTo>
-                  <a:lnTo>
-                    <a:pt x="5537416" y="203554"/>
-                  </a:lnTo>
-                  <a:lnTo>
-                    <a:pt x="5625311" y="206785"/>
-                  </a:lnTo>
-                  <a:lnTo>
-                    <a:pt x="5713207" y="210016"/>
-                  </a:lnTo>
-                  <a:lnTo>
-                    <a:pt x="5801102" y="213247"/>
-                  </a:lnTo>
-                  <a:lnTo>
-                    <a:pt x="5888998" y="216478"/>
-                  </a:lnTo>
-                  <a:lnTo>
-                    <a:pt x="5976893" y="219709"/>
-                  </a:lnTo>
-                  <a:lnTo>
-                    <a:pt x="6064789" y="222941"/>
-                  </a:lnTo>
-                  <a:lnTo>
-                    <a:pt x="6152684" y="226172"/>
-                  </a:lnTo>
-                  <a:lnTo>
-                    <a:pt x="6240580" y="229403"/>
-                  </a:lnTo>
-                  <a:lnTo>
-                    <a:pt x="6328475" y="232634"/>
-                  </a:lnTo>
-                  <a:lnTo>
-                    <a:pt x="6416371" y="235865"/>
-                  </a:lnTo>
-                  <a:lnTo>
-                    <a:pt x="6504266" y="239096"/>
-                  </a:lnTo>
-                  <a:lnTo>
-                    <a:pt x="6592162" y="242327"/>
-                  </a:lnTo>
-                  <a:lnTo>
-                    <a:pt x="6680057" y="245558"/>
-                  </a:lnTo>
-                  <a:lnTo>
-                    <a:pt x="6767953" y="248789"/>
-                  </a:lnTo>
-                  <a:lnTo>
-                    <a:pt x="6855848" y="252020"/>
-                  </a:lnTo>
-                  <a:lnTo>
-                    <a:pt x="6943744" y="255251"/>
+                    <a:pt x="87895" y="2976"/>
+                  </a:lnTo>
+                  <a:lnTo>
+                    <a:pt x="175790" y="5953"/>
+                  </a:lnTo>
+                  <a:lnTo>
+                    <a:pt x="263686" y="8930"/>
+                  </a:lnTo>
+                  <a:lnTo>
+                    <a:pt x="351581" y="11906"/>
+                  </a:lnTo>
+                  <a:lnTo>
+                    <a:pt x="439477" y="14883"/>
+                  </a:lnTo>
+                  <a:lnTo>
+                    <a:pt x="527372" y="17860"/>
+                  </a:lnTo>
+                  <a:lnTo>
+                    <a:pt x="615268" y="20837"/>
+                  </a:lnTo>
+                  <a:lnTo>
+                    <a:pt x="703163" y="23813"/>
+                  </a:lnTo>
+                  <a:lnTo>
+                    <a:pt x="791059" y="26790"/>
+                  </a:lnTo>
+                  <a:lnTo>
+                    <a:pt x="878954" y="29767"/>
+                  </a:lnTo>
+                  <a:lnTo>
+                    <a:pt x="966850" y="32744"/>
+                  </a:lnTo>
+                  <a:lnTo>
+                    <a:pt x="1054745" y="35720"/>
+                  </a:lnTo>
+                  <a:lnTo>
+                    <a:pt x="1142641" y="38697"/>
+                  </a:lnTo>
+                  <a:lnTo>
+                    <a:pt x="1230536" y="41674"/>
+                  </a:lnTo>
+                  <a:lnTo>
+                    <a:pt x="1318432" y="44651"/>
+                  </a:lnTo>
+                  <a:lnTo>
+                    <a:pt x="1406327" y="47627"/>
+                  </a:lnTo>
+                  <a:lnTo>
+                    <a:pt x="1494223" y="50604"/>
+                  </a:lnTo>
+                  <a:lnTo>
+                    <a:pt x="1582118" y="53581"/>
+                  </a:lnTo>
+                  <a:lnTo>
+                    <a:pt x="1670014" y="56558"/>
+                  </a:lnTo>
+                  <a:lnTo>
+                    <a:pt x="1757909" y="59534"/>
+                  </a:lnTo>
+                  <a:lnTo>
+                    <a:pt x="1845805" y="62511"/>
+                  </a:lnTo>
+                  <a:lnTo>
+                    <a:pt x="1933700" y="65488"/>
+                  </a:lnTo>
+                  <a:lnTo>
+                    <a:pt x="2021596" y="68465"/>
+                  </a:lnTo>
+                  <a:lnTo>
+                    <a:pt x="2109491" y="71441"/>
+                  </a:lnTo>
+                  <a:lnTo>
+                    <a:pt x="2197387" y="74418"/>
+                  </a:lnTo>
+                  <a:lnTo>
+                    <a:pt x="2285282" y="77395"/>
+                  </a:lnTo>
+                  <a:lnTo>
+                    <a:pt x="2373178" y="80372"/>
+                  </a:lnTo>
+                  <a:lnTo>
+                    <a:pt x="2461073" y="83348"/>
+                  </a:lnTo>
+                  <a:lnTo>
+                    <a:pt x="2548969" y="86325"/>
+                  </a:lnTo>
+                  <a:lnTo>
+                    <a:pt x="2636864" y="89302"/>
+                  </a:lnTo>
+                  <a:lnTo>
+                    <a:pt x="2724760" y="92279"/>
+                  </a:lnTo>
+                  <a:lnTo>
+                    <a:pt x="2812655" y="95255"/>
+                  </a:lnTo>
+                  <a:lnTo>
+                    <a:pt x="2900551" y="98232"/>
+                  </a:lnTo>
+                  <a:lnTo>
+                    <a:pt x="2988446" y="101209"/>
+                  </a:lnTo>
+                  <a:lnTo>
+                    <a:pt x="3076342" y="104186"/>
+                  </a:lnTo>
+                  <a:lnTo>
+                    <a:pt x="3164237" y="107162"/>
+                  </a:lnTo>
+                  <a:lnTo>
+                    <a:pt x="3252133" y="110139"/>
+                  </a:lnTo>
+                  <a:lnTo>
+                    <a:pt x="3340028" y="113116"/>
+                  </a:lnTo>
+                  <a:lnTo>
+                    <a:pt x="3427924" y="116093"/>
+                  </a:lnTo>
+                  <a:lnTo>
+                    <a:pt x="3515819" y="119069"/>
+                  </a:lnTo>
+                  <a:lnTo>
+                    <a:pt x="3603715" y="122046"/>
+                  </a:lnTo>
+                  <a:lnTo>
+                    <a:pt x="3691610" y="125023"/>
+                  </a:lnTo>
+                  <a:lnTo>
+                    <a:pt x="3779506" y="128000"/>
+                  </a:lnTo>
+                  <a:lnTo>
+                    <a:pt x="3867401" y="130976"/>
+                  </a:lnTo>
+                  <a:lnTo>
+                    <a:pt x="3955297" y="133953"/>
+                  </a:lnTo>
+                  <a:lnTo>
+                    <a:pt x="4043192" y="136930"/>
+                  </a:lnTo>
+                  <a:lnTo>
+                    <a:pt x="4131088" y="139907"/>
+                  </a:lnTo>
+                  <a:lnTo>
+                    <a:pt x="4218983" y="142883"/>
+                  </a:lnTo>
+                  <a:lnTo>
+                    <a:pt x="4306879" y="145860"/>
+                  </a:lnTo>
+                  <a:lnTo>
+                    <a:pt x="4394774" y="148837"/>
+                  </a:lnTo>
+                  <a:lnTo>
+                    <a:pt x="4482670" y="151814"/>
+                  </a:lnTo>
+                  <a:lnTo>
+                    <a:pt x="4570565" y="154790"/>
+                  </a:lnTo>
+                  <a:lnTo>
+                    <a:pt x="4658461" y="157767"/>
+                  </a:lnTo>
+                  <a:lnTo>
+                    <a:pt x="4746356" y="160744"/>
+                  </a:lnTo>
+                  <a:lnTo>
+                    <a:pt x="4834252" y="163721"/>
+                  </a:lnTo>
+                  <a:lnTo>
+                    <a:pt x="4922147" y="166697"/>
+                  </a:lnTo>
+                  <a:lnTo>
+                    <a:pt x="5010043" y="169674"/>
+                  </a:lnTo>
+                  <a:lnTo>
+                    <a:pt x="5097938" y="172651"/>
+                  </a:lnTo>
+                  <a:lnTo>
+                    <a:pt x="5185834" y="175628"/>
+                  </a:lnTo>
+                  <a:lnTo>
+                    <a:pt x="5273729" y="178604"/>
+                  </a:lnTo>
+                  <a:lnTo>
+                    <a:pt x="5361625" y="181581"/>
+                  </a:lnTo>
+                  <a:lnTo>
+                    <a:pt x="5449520" y="184558"/>
+                  </a:lnTo>
+                  <a:lnTo>
+                    <a:pt x="5537416" y="187535"/>
+                  </a:lnTo>
+                  <a:lnTo>
+                    <a:pt x="5625311" y="190511"/>
+                  </a:lnTo>
+                  <a:lnTo>
+                    <a:pt x="5713207" y="193488"/>
+                  </a:lnTo>
+                  <a:lnTo>
+                    <a:pt x="5801102" y="196465"/>
+                  </a:lnTo>
+                  <a:lnTo>
+                    <a:pt x="5888998" y="199442"/>
+                  </a:lnTo>
+                  <a:lnTo>
+                    <a:pt x="5976893" y="202418"/>
+                  </a:lnTo>
+                  <a:lnTo>
+                    <a:pt x="6064789" y="205395"/>
+                  </a:lnTo>
+                  <a:lnTo>
+                    <a:pt x="6152684" y="208372"/>
+                  </a:lnTo>
+                  <a:lnTo>
+                    <a:pt x="6240580" y="211349"/>
+                  </a:lnTo>
+                  <a:lnTo>
+                    <a:pt x="6328475" y="214325"/>
+                  </a:lnTo>
+                  <a:lnTo>
+                    <a:pt x="6416371" y="217302"/>
+                  </a:lnTo>
+                  <a:lnTo>
+                    <a:pt x="6504266" y="220279"/>
+                  </a:lnTo>
+                  <a:lnTo>
+                    <a:pt x="6592162" y="223256"/>
+                  </a:lnTo>
+                  <a:lnTo>
+                    <a:pt x="6680057" y="226232"/>
+                  </a:lnTo>
+                  <a:lnTo>
+                    <a:pt x="6767953" y="229209"/>
+                  </a:lnTo>
+                  <a:lnTo>
+                    <a:pt x="6855848" y="232186"/>
+                  </a:lnTo>
+                  <a:lnTo>
+                    <a:pt x="6943744" y="235163"/>
                   </a:lnTo>
                 </a:path>
               </a:pathLst>
@@ -11004,7 +10969,7 @@
         </p:sp>
         <p:sp>
           <p:nvSpPr>
-            <p:cNvPr id="216" name="tx216"/>
+            <p:cNvPr id="215" name="tx215"/>
             <p:cNvSpPr/>
             <p:nvPr/>
           </p:nvSpPr>
@@ -11050,7 +11015,7 @@
         </p:sp>
         <p:sp>
           <p:nvSpPr>
-            <p:cNvPr id="217" name="tx217"/>
+            <p:cNvPr id="216" name="tx216"/>
             <p:cNvSpPr/>
             <p:nvPr/>
           </p:nvSpPr>
@@ -11096,7 +11061,7 @@
         </p:sp>
         <p:sp>
           <p:nvSpPr>
-            <p:cNvPr id="218" name="tx218"/>
+            <p:cNvPr id="217" name="tx217"/>
             <p:cNvSpPr/>
             <p:nvPr/>
           </p:nvSpPr>
@@ -11142,7 +11107,7 @@
         </p:sp>
         <p:sp>
           <p:nvSpPr>
-            <p:cNvPr id="219" name="tx219"/>
+            <p:cNvPr id="218" name="tx218"/>
             <p:cNvSpPr/>
             <p:nvPr/>
           </p:nvSpPr>
@@ -11188,7 +11153,7 @@
         </p:sp>
         <p:sp>
           <p:nvSpPr>
-            <p:cNvPr id="220" name="tx220"/>
+            <p:cNvPr id="219" name="tx219"/>
             <p:cNvSpPr/>
             <p:nvPr/>
           </p:nvSpPr>
@@ -11234,7 +11199,7 @@
         </p:sp>
         <p:sp>
           <p:nvSpPr>
-            <p:cNvPr id="221" name="tx221"/>
+            <p:cNvPr id="220" name="tx220"/>
             <p:cNvSpPr/>
             <p:nvPr/>
           </p:nvSpPr>
@@ -11280,7 +11245,7 @@
         </p:sp>
         <p:sp>
           <p:nvSpPr>
-            <p:cNvPr id="222" name="tx222"/>
+            <p:cNvPr id="221" name="tx221"/>
             <p:cNvSpPr/>
             <p:nvPr/>
           </p:nvSpPr>
@@ -11326,7 +11291,7 @@
         </p:sp>
         <p:sp>
           <p:nvSpPr>
-            <p:cNvPr id="223" name="tx223"/>
+            <p:cNvPr id="222" name="tx222"/>
             <p:cNvSpPr/>
             <p:nvPr/>
           </p:nvSpPr>
@@ -11372,7 +11337,7 @@
         </p:sp>
         <p:sp>
           <p:nvSpPr>
-            <p:cNvPr id="224" name="tx224"/>
+            <p:cNvPr id="223" name="tx223"/>
             <p:cNvSpPr/>
             <p:nvPr/>
           </p:nvSpPr>
@@ -11418,7 +11383,7 @@
         </p:sp>
         <p:sp>
           <p:nvSpPr>
-            <p:cNvPr id="225" name="tx225"/>
+            <p:cNvPr id="224" name="tx224"/>
             <p:cNvSpPr/>
             <p:nvPr/>
           </p:nvSpPr>
@@ -11464,7 +11429,7 @@
         </p:sp>
         <p:sp>
           <p:nvSpPr>
-            <p:cNvPr id="226" name="tx226"/>
+            <p:cNvPr id="225" name="tx225"/>
             <p:cNvSpPr/>
             <p:nvPr/>
           </p:nvSpPr>
